--- a/1 Year 12 Weekly/Week 10 (16 Nov) 1.3.1 Compression and encryption/1 Lesson 1.3.1.pptx
+++ b/1 Year 12 Weekly/Week 10 (16 Nov) 1.3.1 Compression and encryption/1 Lesson 1.3.1.pptx
@@ -18,6 +18,23 @@
     <p:sldId id="266" r:id="rId17"/>
     <p:sldId id="267" r:id="rId18"/>
     <p:sldId id="268" r:id="rId19"/>
+    <p:sldId id="269" r:id="rId20"/>
+    <p:sldId id="270" r:id="rId21"/>
+    <p:sldId id="271" r:id="rId22"/>
+    <p:sldId id="272" r:id="rId23"/>
+    <p:sldId id="273" r:id="rId24"/>
+    <p:sldId id="274" r:id="rId25"/>
+    <p:sldId id="275" r:id="rId26"/>
+    <p:sldId id="276" r:id="rId27"/>
+    <p:sldId id="277" r:id="rId28"/>
+    <p:sldId id="278" r:id="rId29"/>
+    <p:sldId id="279" r:id="rId30"/>
+    <p:sldId id="280" r:id="rId31"/>
+    <p:sldId id="281" r:id="rId32"/>
+    <p:sldId id="282" r:id="rId33"/>
+    <p:sldId id="283" r:id="rId34"/>
+    <p:sldId id="284" r:id="rId35"/>
+    <p:sldId id="285" r:id="rId36"/>
   </p:sldIdLst>
   <p:sldSz cx="12191695" cy="6858000" type="screen4x3"/>
   <p:notesSz cx="6858000" cy="9144000"/>
@@ -3182,7 +3199,7 @@
                 </a:solidFill>
                 <a:latin typeface="Calibri"/>
               </a:rPr>
-              <a:t>Lesson deck — editable skeleton: adapt freely.</a:t>
+              <a:t>Week 10 (16 Nov)</a:t>
             </a:r>
           </a:p>
         </p:txBody>
@@ -3242,7 +3259,7 @@
                 </a:solidFill>
                 <a:latin typeface="Calibri"/>
               </a:rPr>
-              <a:t>Worked example</a:t>
+              <a:t>When RLE fails</a:t>
             </a:r>
           </a:p>
         </p:txBody>
@@ -3271,29 +3288,17 @@
           <a:p>
             <a:pPr/>
             <a:r>
-              <a:rPr sz="2200" b="1">
-                <a:solidFill>
-                  <a:srgbClr val="2B6CB0"/>
-                </a:solidFill>
-                <a:latin typeface="Calibri"/>
-              </a:rPr>
-              <a:t>Encoding and decoding with Run Length Encoding</a:t>
-            </a:r>
-          </a:p>
-          <a:p>
-            <a:pPr lvl="1"/>
-            <a:r>
               <a:rPr sz="2000" b="0">
                 <a:solidFill>
                   <a:srgbClr val="222222"/>
                 </a:solidFill>
                 <a:latin typeface="Calibri"/>
               </a:rPr>
-              <a:t>1. Encode the pixel run W W W W W B B W W W W W W using value+count pairs.</a:t>
-            </a:r>
-          </a:p>
-          <a:p>
-            <a:pPr lvl="1"/>
+              <a:t>With few or short runs there is nothing to shorten.</a:t>
+            </a:r>
+          </a:p>
+          <a:p>
+            <a:pPr/>
             <a:r>
               <a:rPr sz="2000" b="0">
                 <a:solidFill>
@@ -3301,11 +3306,11 @@
                 </a:solidFill>
                 <a:latin typeface="Calibri"/>
               </a:rPr>
-              <a:t>2. Group consecutive identical values: five W, then two B, then six W.</a:t>
-            </a:r>
-          </a:p>
-          <a:p>
-            <a:pPr lvl="1"/>
+              <a:t>ABABAB becomes 1A 1B 1A 1B 1A 1B: six characters have become twelve.</a:t>
+            </a:r>
+          </a:p>
+          <a:p>
+            <a:pPr/>
             <a:r>
               <a:rPr sz="2000" b="0">
                 <a:solidFill>
@@ -3313,11 +3318,11 @@
                 </a:solidFill>
                 <a:latin typeface="Calibri"/>
               </a:rPr>
-              <a:t>3. Write each group as value+count: 5W 2B 6W (13 values stored as 3 pairs).</a:t>
-            </a:r>
-          </a:p>
-          <a:p>
-            <a:pPr lvl="1"/>
+              <a:t>Alternating or highly varied data can double in size under RLE.</a:t>
+            </a:r>
+          </a:p>
+          <a:p>
+            <a:pPr/>
             <a:r>
               <a:rPr sz="2000" b="0">
                 <a:solidFill>
@@ -3325,43 +3330,19 @@
                 </a:solidFill>
                 <a:latin typeface="Calibri"/>
               </a:rPr>
-              <a:t>4. Now decode 5A 3B 1C 4A back to the original sequence.</a:t>
-            </a:r>
-          </a:p>
-          <a:p>
-            <a:pPr lvl="1"/>
-            <a:r>
-              <a:rPr sz="2000" b="0">
-                <a:solidFill>
-                  <a:srgbClr val="222222"/>
-                </a:solidFill>
-                <a:latin typeface="Calibri"/>
-              </a:rPr>
-              <a:t>5. Expand each value+count pair: AAAAA, BBB, C, AAAA.</a:t>
-            </a:r>
-          </a:p>
-          <a:p>
-            <a:pPr lvl="1"/>
-            <a:r>
-              <a:rPr sz="2000" b="0">
-                <a:solidFill>
-                  <a:srgbClr val="222222"/>
-                </a:solidFill>
-                <a:latin typeface="Calibri"/>
-              </a:rPr>
-              <a:t>6. Concatenate to give AAAAABBBCAAAA (13 characters).</a:t>
-            </a:r>
-          </a:p>
-          <a:p>
-            <a:pPr lvl="1"/>
-            <a:r>
-              <a:rPr sz="2000" b="0">
-                <a:solidFill>
-                  <a:srgbClr val="222222"/>
-                </a:solidFill>
-                <a:latin typeface="Calibri"/>
-              </a:rPr>
-              <a:t>7. Note: if the data had few repeats, the value+count pairs could be longer than the original, so RLE would enlarge it.</a:t>
+              <a:t>Always state in answers that RLE only helps when long runs exist.</a:t>
+            </a:r>
+          </a:p>
+          <a:p>
+            <a:pPr/>
+            <a:r>
+              <a:rPr sz="1800" b="1">
+                <a:solidFill>
+                  <a:srgbClr val="B76E00"/>
+                </a:solidFill>
+                <a:latin typeface="Calibri"/>
+              </a:rPr>
+              <a:t>RLE does not always make a file smaller: a favourite examiner follow-up.</a:t>
             </a:r>
           </a:p>
         </p:txBody>
@@ -3421,7 +3402,7 @@
                 </a:solidFill>
                 <a:latin typeface="Calibri"/>
               </a:rPr>
-              <a:t>Your turn</a:t>
+              <a:t>Dictionary coding</a:t>
             </a:r>
           </a:p>
         </p:txBody>
@@ -3450,48 +3431,61 @@
           <a:p>
             <a:pPr/>
             <a:r>
-              <a:rPr sz="2400" b="1">
-                <a:solidFill>
-                  <a:srgbClr val="2B6CB0"/>
-                </a:solidFill>
-                <a:latin typeface="Calibri"/>
-              </a:rPr>
-              <a:t>Task</a:t>
-            </a:r>
-          </a:p>
-          <a:p>
-            <a:pPr lvl="1"/>
-            <a:r>
-              <a:rPr sz="2200" b="0">
-                <a:solidFill>
-                  <a:srgbClr val="222222"/>
-                </a:solidFill>
-                <a:latin typeface="Calibri"/>
-              </a:rPr>
-              <a:t>Given the bitmap row B B B B W W B B B W W W W W, encode it with RLE and state the number of value+count pairs produced. Then decode 4G 1R 3G and explain in one sentence why this row compresses well.</a:t>
-            </a:r>
-          </a:p>
-          <a:p>
-            <a:r>
-              <a:rPr sz="2400" b="1">
-                <a:solidFill>
-                  <a:srgbClr val="B76E00"/>
-                </a:solidFill>
-                <a:latin typeface="Calibri"/>
-              </a:rPr>
-              <a:t>Challenge / stretch</a:t>
-            </a:r>
-          </a:p>
-          <a:p>
-            <a:pPr lvl="1"/>
-            <a:r>
-              <a:rPr sz="2200" b="0">
-                <a:solidFill>
-                  <a:srgbClr val="222222"/>
-                </a:solidFill>
-                <a:latin typeface="Calibri"/>
-              </a:rPr>
-              <a:t>A developer claims RLE will always shrink a file. Construct a short example sequence where RLE produces a larger output than the original, and explain why, then state what kind of data RLE is genuinely suited to.</a:t>
+              <a:rPr sz="2000" b="0">
+                <a:solidFill>
+                  <a:srgbClr val="222222"/>
+                </a:solidFill>
+                <a:latin typeface="Calibri"/>
+              </a:rPr>
+              <a:t>Recurring patterns or words are stored once in a dictionary.</a:t>
+            </a:r>
+          </a:p>
+          <a:p>
+            <a:pPr/>
+            <a:r>
+              <a:rPr sz="2000" b="0">
+                <a:solidFill>
+                  <a:srgbClr val="222222"/>
+                </a:solidFill>
+                <a:latin typeface="Calibri"/>
+              </a:rPr>
+              <a:t>Each occurrence in the data is replaced by a short reference to its dictionary entry.</a:t>
+            </a:r>
+          </a:p>
+          <a:p>
+            <a:pPr/>
+            <a:r>
+              <a:rPr sz="2000" b="0">
+                <a:solidFill>
+                  <a:srgbClr val="222222"/>
+                </a:solidFill>
+                <a:latin typeface="Calibri"/>
+              </a:rPr>
+              <a:t>The dictionary must be stored or sent with the compressed file.</a:t>
+            </a:r>
+          </a:p>
+          <a:p>
+            <a:pPr/>
+            <a:r>
+              <a:rPr sz="2000" b="0">
+                <a:solidFill>
+                  <a:srgbClr val="222222"/>
+                </a:solidFill>
+                <a:latin typeface="Calibri"/>
+              </a:rPr>
+              <a:t>Lossless: substituting entries back for references rebuilds the original exactly.</a:t>
+            </a:r>
+          </a:p>
+          <a:p>
+            <a:pPr/>
+            <a:r>
+              <a:rPr sz="2000" b="0">
+                <a:solidFill>
+                  <a:srgbClr val="222222"/>
+                </a:solidFill>
+                <a:latin typeface="Calibri"/>
+              </a:rPr>
+              <a:t>Suits text, where the same words repeat; LZW and ZIP use dictionary methods.</a:t>
             </a:r>
           </a:p>
         </p:txBody>
@@ -3551,7 +3545,7 @@
                 </a:solidFill>
                 <a:latin typeface="Calibri"/>
               </a:rPr>
-              <a:t>Exit ticket</a:t>
+              <a:t>Symmetric encryption</a:t>
             </a:r>
           </a:p>
         </p:txBody>
@@ -3578,36 +3572,51 @@
           </a:bodyPr>
           <a:lstStyle/>
           <a:p>
-            <a:r>
-              <a:rPr sz="2200" b="1">
-                <a:solidFill>
-                  <a:srgbClr val="222222"/>
-                </a:solidFill>
-                <a:latin typeface="Calibri"/>
-              </a:rPr>
-              <a:t>1. Why is hashing rather than encryption used to store passwords?</a:t>
-            </a:r>
-          </a:p>
-          <a:p>
-            <a:r>
-              <a:rPr sz="2200" b="1">
-                <a:solidFill>
-                  <a:srgbClr val="222222"/>
-                </a:solidFill>
-                <a:latin typeface="Calibri"/>
-              </a:rPr>
-              <a:t>2. State two properties of a good hash function.</a:t>
-            </a:r>
-          </a:p>
-          <a:p>
-            <a:r>
-              <a:rPr sz="2200" b="1">
-                <a:solidFill>
-                  <a:srgbClr val="222222"/>
-                </a:solidFill>
-                <a:latin typeface="Calibri"/>
-              </a:rPr>
-              <a:t>3. How does asymmetric encryption let two strangers exchange data securely?</a:t>
+            <a:pPr/>
+            <a:r>
+              <a:rPr sz="2000" b="0">
+                <a:solidFill>
+                  <a:srgbClr val="222222"/>
+                </a:solidFill>
+                <a:latin typeface="Calibri"/>
+              </a:rPr>
+              <a:t>Encryption scrambles plaintext into ciphertext using an algorithm and a key.</a:t>
+            </a:r>
+          </a:p>
+          <a:p>
+            <a:pPr/>
+            <a:r>
+              <a:rPr sz="2000" b="0">
+                <a:solidFill>
+                  <a:srgbClr val="222222"/>
+                </a:solidFill>
+                <a:latin typeface="Calibri"/>
+              </a:rPr>
+              <a:t>Symmetric encryption uses the same key to encrypt and decrypt.</a:t>
+            </a:r>
+          </a:p>
+          <a:p>
+            <a:pPr/>
+            <a:r>
+              <a:rPr sz="2000" b="0">
+                <a:solidFill>
+                  <a:srgbClr val="222222"/>
+                </a:solidFill>
+                <a:latin typeface="Calibri"/>
+              </a:rPr>
+              <a:t>It is fast, so it suits bulk data.</a:t>
+            </a:r>
+          </a:p>
+          <a:p>
+            <a:pPr/>
+            <a:r>
+              <a:rPr sz="2000" b="0">
+                <a:solidFill>
+                  <a:srgbClr val="222222"/>
+                </a:solidFill>
+                <a:latin typeface="Calibri"/>
+              </a:rPr>
+              <a:t>Weakness: both parties need the key, and sending it risks interception, the key distribution problem.</a:t>
             </a:r>
           </a:p>
         </p:txBody>
@@ -3667,7 +3676,7 @@
                 </a:solidFill>
                 <a:latin typeface="Calibri"/>
               </a:rPr>
-              <a:t>Exit ticket — answers</a:t>
+              <a:t>Asymmetric encryption</a:t>
             </a:r>
           </a:p>
         </p:txBody>
@@ -3694,72 +3703,1005 @@
           </a:bodyPr>
           <a:lstStyle/>
           <a:p>
+            <a:pPr/>
+            <a:r>
+              <a:rPr sz="2000" b="0">
+                <a:solidFill>
+                  <a:srgbClr val="222222"/>
+                </a:solidFill>
+                <a:latin typeface="Calibri"/>
+              </a:rPr>
+              <a:t>Each user has a key pair: a public key shared openly and a private key kept secret.</a:t>
+            </a:r>
+          </a:p>
+          <a:p>
+            <a:pPr/>
+            <a:r>
+              <a:rPr sz="2000" b="0">
+                <a:solidFill>
+                  <a:srgbClr val="222222"/>
+                </a:solidFill>
+                <a:latin typeface="Calibri"/>
+              </a:rPr>
+              <a:t>A message encrypted with the recipient's public key can only be decrypted with their private key.</a:t>
+            </a:r>
+          </a:p>
+          <a:p>
+            <a:pPr/>
+            <a:r>
+              <a:rPr sz="2000" b="0">
+                <a:solidFill>
+                  <a:srgbClr val="222222"/>
+                </a:solidFill>
+                <a:latin typeface="Calibri"/>
+              </a:rPr>
+              <a:t>Anyone may encrypt to you, but only you can decrypt: distribution is solved.</a:t>
+            </a:r>
+          </a:p>
+          <a:p>
+            <a:pPr/>
+            <a:r>
+              <a:rPr sz="2000" b="0">
+                <a:solidFill>
+                  <a:srgbClr val="222222"/>
+                </a:solidFill>
+                <a:latin typeface="Calibri"/>
+              </a:rPr>
+              <a:t>It is slower than symmetric encryption, so it is used sparingly.</a:t>
+            </a:r>
+          </a:p>
+        </p:txBody>
+      </p:sp>
+    </p:spTree>
+  </p:cSld>
+  <p:clrMapOvr>
+    <a:masterClrMapping/>
+  </p:clrMapOvr>
+</p:sld>
+</file>
+
+<file path=ppt/slides/slide14.xml><?xml version="1.0" encoding="utf-8"?>
+<p:sld xmlns:a="http://schemas.openxmlformats.org/drawingml/2006/main" xmlns:p="http://schemas.openxmlformats.org/presentationml/2006/main" xmlns:r="http://schemas.openxmlformats.org/officeDocument/2006/relationships">
+  <p:cSld>
+    <p:bg>
+      <p:bgPr>
+        <a:solidFill>
+          <a:srgbClr val="FFFFFF"/>
+        </a:solidFill>
+        <a:effectLst/>
+      </p:bgPr>
+    </p:bg>
+    <p:spTree>
+      <p:nvGrpSpPr>
+        <p:cNvPr id="1" name=""/>
+        <p:cNvGrpSpPr/>
+        <p:nvPr/>
+      </p:nvGrpSpPr>
+      <p:grpSpPr/>
+      <p:sp>
+        <p:nvSpPr>
+          <p:cNvPr id="2" name="TextBox 1"/>
+          <p:cNvSpPr txBox="1"/>
+          <p:nvPr/>
+        </p:nvSpPr>
+        <p:spPr>
+          <a:xfrm>
+            <a:off x="548640" y="274320"/>
+            <a:ext cx="11064240" cy="822960"/>
+          </a:xfrm>
+          <a:prstGeom prst="rect">
+            <a:avLst/>
+          </a:prstGeom>
+          <a:noFill/>
+        </p:spPr>
+        <p:txBody>
+          <a:bodyPr wrap="square">
+            <a:spAutoFit/>
+          </a:bodyPr>
+          <a:lstStyle/>
+          <a:p>
+            <a:r>
+              <a:rPr sz="3000" b="1" i="0">
+                <a:solidFill>
+                  <a:srgbClr val="2B6CB0"/>
+                </a:solidFill>
+                <a:latin typeface="Calibri"/>
+              </a:rPr>
+              <a:t>Digital signatures and hybrid systems</a:t>
+            </a:r>
+          </a:p>
+        </p:txBody>
+      </p:sp>
+      <p:sp>
+        <p:nvSpPr>
+          <p:cNvPr id="3" name="TextBox 2"/>
+          <p:cNvSpPr txBox="1"/>
+          <p:nvPr/>
+        </p:nvSpPr>
+        <p:spPr>
+          <a:xfrm>
+            <a:off x="640080" y="1280160"/>
+            <a:ext cx="10881360" cy="5120640"/>
+          </a:xfrm>
+          <a:prstGeom prst="rect">
+            <a:avLst/>
+          </a:prstGeom>
+          <a:noFill/>
+        </p:spPr>
+        <p:txBody>
+          <a:bodyPr wrap="square">
+            <a:spAutoFit/>
+          </a:bodyPr>
+          <a:lstStyle/>
+          <a:p>
+            <a:pPr/>
+            <a:r>
+              <a:rPr sz="2000" b="0">
+                <a:solidFill>
+                  <a:srgbClr val="222222"/>
+                </a:solidFill>
+                <a:latin typeface="Calibri"/>
+              </a:rPr>
+              <a:t>To sign, the sender hashes the message and encrypts the hash with their private key.</a:t>
+            </a:r>
+          </a:p>
+          <a:p>
+            <a:pPr/>
+            <a:r>
+              <a:rPr sz="2000" b="0">
+                <a:solidFill>
+                  <a:srgbClr val="222222"/>
+                </a:solidFill>
+                <a:latin typeface="Calibri"/>
+              </a:rPr>
+              <a:t>The receiver decrypts the hash with the sender's public key, rehashes the message and compares.</a:t>
+            </a:r>
+          </a:p>
+          <a:p>
+            <a:pPr/>
+            <a:r>
+              <a:rPr sz="2000" b="0">
+                <a:solidFill>
+                  <a:srgbClr val="222222"/>
+                </a:solidFill>
+                <a:latin typeface="Calibri"/>
+              </a:rPr>
+              <a:t>A match proves who sent it and that it was not altered.</a:t>
+            </a:r>
+          </a:p>
+          <a:p>
+            <a:pPr/>
+            <a:r>
+              <a:rPr sz="2000" b="0">
+                <a:solidFill>
+                  <a:srgbClr val="222222"/>
+                </a:solidFill>
+                <a:latin typeface="Calibri"/>
+              </a:rPr>
+              <a:t>HTTPS uses asymmetric encryption to exchange a symmetric session key, then symmetric for the bulk data.</a:t>
+            </a:r>
+          </a:p>
+        </p:txBody>
+      </p:sp>
+    </p:spTree>
+  </p:cSld>
+  <p:clrMapOvr>
+    <a:masterClrMapping/>
+  </p:clrMapOvr>
+</p:sld>
+</file>
+
+<file path=ppt/slides/slide15.xml><?xml version="1.0" encoding="utf-8"?>
+<p:sld xmlns:a="http://schemas.openxmlformats.org/drawingml/2006/main" xmlns:p="http://schemas.openxmlformats.org/presentationml/2006/main" xmlns:r="http://schemas.openxmlformats.org/officeDocument/2006/relationships">
+  <p:cSld>
+    <p:bg>
+      <p:bgPr>
+        <a:solidFill>
+          <a:srgbClr val="FFFFFF"/>
+        </a:solidFill>
+        <a:effectLst/>
+      </p:bgPr>
+    </p:bg>
+    <p:spTree>
+      <p:nvGrpSpPr>
+        <p:cNvPr id="1" name=""/>
+        <p:cNvGrpSpPr/>
+        <p:nvPr/>
+      </p:nvGrpSpPr>
+      <p:grpSpPr/>
+      <p:sp>
+        <p:nvSpPr>
+          <p:cNvPr id="2" name="TextBox 1"/>
+          <p:cNvSpPr txBox="1"/>
+          <p:nvPr/>
+        </p:nvSpPr>
+        <p:spPr>
+          <a:xfrm>
+            <a:off x="548640" y="274320"/>
+            <a:ext cx="11064240" cy="822960"/>
+          </a:xfrm>
+          <a:prstGeom prst="rect">
+            <a:avLst/>
+          </a:prstGeom>
+          <a:noFill/>
+        </p:spPr>
+        <p:txBody>
+          <a:bodyPr wrap="square">
+            <a:spAutoFit/>
+          </a:bodyPr>
+          <a:lstStyle/>
+          <a:p>
+            <a:r>
+              <a:rPr sz="3000" b="1" i="0">
+                <a:solidFill>
+                  <a:srgbClr val="2B6CB0"/>
+                </a:solidFill>
+                <a:latin typeface="Calibri"/>
+              </a:rPr>
+              <a:t>Hashing and its uses</a:t>
+            </a:r>
+          </a:p>
+        </p:txBody>
+      </p:sp>
+      <p:sp>
+        <p:nvSpPr>
+          <p:cNvPr id="3" name="TextBox 2"/>
+          <p:cNvSpPr txBox="1"/>
+          <p:nvPr/>
+        </p:nvSpPr>
+        <p:spPr>
+          <a:xfrm>
+            <a:off x="640080" y="1280160"/>
+            <a:ext cx="10881360" cy="5120640"/>
+          </a:xfrm>
+          <a:prstGeom prst="rect">
+            <a:avLst/>
+          </a:prstGeom>
+          <a:noFill/>
+        </p:spPr>
+        <p:txBody>
+          <a:bodyPr wrap="square">
+            <a:spAutoFit/>
+          </a:bodyPr>
+          <a:lstStyle/>
+          <a:p>
+            <a:pPr/>
+            <a:r>
+              <a:rPr sz="2000" b="0">
+                <a:solidFill>
+                  <a:srgbClr val="222222"/>
+                </a:solidFill>
+                <a:latin typeface="Calibri"/>
+              </a:rPr>
+              <a:t>A hash function turns an input into a fixed-length digest.</a:t>
+            </a:r>
+          </a:p>
+          <a:p>
+            <a:pPr/>
+            <a:r>
+              <a:rPr sz="2000" b="0">
+                <a:solidFill>
+                  <a:srgbClr val="222222"/>
+                </a:solidFill>
+                <a:latin typeface="Calibri"/>
+              </a:rPr>
+              <a:t>It is one-way: the input cannot be recovered from the hash.</a:t>
+            </a:r>
+          </a:p>
+          <a:p>
+            <a:pPr/>
+            <a:r>
+              <a:rPr sz="2000" b="0">
+                <a:solidFill>
+                  <a:srgbClr val="222222"/>
+                </a:solidFill>
+                <a:latin typeface="Calibri"/>
+              </a:rPr>
+              <a:t>It is deterministic, fast, and good functions make collisions rare.</a:t>
+            </a:r>
+          </a:p>
+          <a:p>
+            <a:pPr/>
+            <a:r>
+              <a:rPr sz="2000" b="0">
+                <a:solidFill>
+                  <a:srgbClr val="222222"/>
+                </a:solidFill>
+                <a:latin typeface="Calibri"/>
+              </a:rPr>
+              <a:t>Passwords are stored as hashes; at login the entered password is hashed and the hashes compared.</a:t>
+            </a:r>
+          </a:p>
+          <a:p>
+            <a:pPr/>
+            <a:r>
+              <a:rPr sz="2000" b="0">
+                <a:solidFill>
+                  <a:srgbClr val="222222"/>
+                </a:solidFill>
+                <a:latin typeface="Calibri"/>
+              </a:rPr>
+              <a:t>Hash tables use the hash of a key as an address, giving near constant time lookup.</a:t>
+            </a:r>
+          </a:p>
+          <a:p>
+            <a:pPr/>
+            <a:r>
+              <a:rPr sz="1800" b="1">
+                <a:solidFill>
+                  <a:srgbClr val="B76E00"/>
+                </a:solidFill>
+                <a:latin typeface="Calibri"/>
+              </a:rPr>
+              <a:t>Hashing is not encryption: there is no key and no way back.</a:t>
+            </a:r>
+          </a:p>
+        </p:txBody>
+      </p:sp>
+    </p:spTree>
+  </p:cSld>
+  <p:clrMapOvr>
+    <a:masterClrMapping/>
+  </p:clrMapOvr>
+</p:sld>
+</file>
+
+<file path=ppt/slides/slide16.xml><?xml version="1.0" encoding="utf-8"?>
+<p:sld xmlns:a="http://schemas.openxmlformats.org/drawingml/2006/main" xmlns:p="http://schemas.openxmlformats.org/presentationml/2006/main" xmlns:r="http://schemas.openxmlformats.org/officeDocument/2006/relationships">
+  <p:cSld>
+    <p:bg>
+      <p:bgPr>
+        <a:solidFill>
+          <a:srgbClr val="FFFFFF"/>
+        </a:solidFill>
+        <a:effectLst/>
+      </p:bgPr>
+    </p:bg>
+    <p:spTree>
+      <p:nvGrpSpPr>
+        <p:cNvPr id="1" name=""/>
+        <p:cNvGrpSpPr/>
+        <p:nvPr/>
+      </p:nvGrpSpPr>
+      <p:grpSpPr/>
+      <p:sp>
+        <p:nvSpPr>
+          <p:cNvPr id="2" name="TextBox 1"/>
+          <p:cNvSpPr txBox="1"/>
+          <p:nvPr/>
+        </p:nvSpPr>
+        <p:spPr>
+          <a:xfrm>
+            <a:off x="548640" y="274320"/>
+            <a:ext cx="11064240" cy="822960"/>
+          </a:xfrm>
+          <a:prstGeom prst="rect">
+            <a:avLst/>
+          </a:prstGeom>
+          <a:noFill/>
+        </p:spPr>
+        <p:txBody>
+          <a:bodyPr wrap="square">
+            <a:spAutoFit/>
+          </a:bodyPr>
+          <a:lstStyle/>
+          <a:p>
+            <a:r>
+              <a:rPr sz="3000" b="1" i="0">
+                <a:solidFill>
+                  <a:srgbClr val="2B6CB0"/>
+                </a:solidFill>
+                <a:latin typeface="Calibri"/>
+              </a:rPr>
+              <a:t>Worked example 1</a:t>
+            </a:r>
+          </a:p>
+        </p:txBody>
+      </p:sp>
+      <p:sp>
+        <p:nvSpPr>
+          <p:cNvPr id="3" name="TextBox 2"/>
+          <p:cNvSpPr txBox="1"/>
+          <p:nvPr/>
+        </p:nvSpPr>
+        <p:spPr>
+          <a:xfrm>
+            <a:off x="640080" y="1280160"/>
+            <a:ext cx="10881360" cy="5120640"/>
+          </a:xfrm>
+          <a:prstGeom prst="rect">
+            <a:avLst/>
+          </a:prstGeom>
+          <a:noFill/>
+        </p:spPr>
+        <p:txBody>
+          <a:bodyPr wrap="square">
+            <a:spAutoFit/>
+          </a:bodyPr>
+          <a:lstStyle/>
+          <a:p>
+            <a:pPr/>
             <a:r>
               <a:rPr sz="2200" b="1">
                 <a:solidFill>
-                  <a:srgbClr val="222222"/>
-                </a:solidFill>
-                <a:latin typeface="Calibri"/>
-              </a:rPr>
-              <a:t>1. Why is hashing rather than encryption used to store passwords?</a:t>
+                  <a:srgbClr val="2B6CB0"/>
+                </a:solidFill>
+                <a:latin typeface="Calibri"/>
+              </a:rPr>
+              <a:t>Run length encoding AAAABBBCCDAA</a:t>
             </a:r>
           </a:p>
           <a:p>
             <a:pPr lvl="1"/>
             <a:r>
-              <a:rPr sz="1800" i="1">
+              <a:rPr sz="1900" b="0">
+                <a:solidFill>
+                  <a:srgbClr val="222222"/>
+                </a:solidFill>
+                <a:latin typeface="Calibri"/>
+              </a:rPr>
+              <a:t>1. Scan for runs: AAAA is 4 As, BBB is 3 Bs, CC is 2 Cs, D is 1 D, AA is 2 As.</a:t>
+            </a:r>
+          </a:p>
+          <a:p>
+            <a:pPr lvl="1"/>
+            <a:r>
+              <a:rPr sz="1900" b="0">
+                <a:solidFill>
+                  <a:srgbClr val="222222"/>
+                </a:solidFill>
+                <a:latin typeface="Calibri"/>
+              </a:rPr>
+              <a:t>2. Check the counts cover the original: 4 + 3 + 2 + 1 + 2 = 12 characters, matching the input length.</a:t>
+            </a:r>
+          </a:p>
+          <a:p>
+            <a:pPr lvl="1"/>
+            <a:r>
+              <a:rPr sz="1900" b="0">
+                <a:solidFill>
+                  <a:srgbClr val="222222"/>
+                </a:solidFill>
+                <a:latin typeface="Calibri"/>
+              </a:rPr>
+              <a:t>3. Encode each run as count then value: 4A 3B 2C 1D 2A.</a:t>
+            </a:r>
+          </a:p>
+          <a:p>
+            <a:pPr lvl="1"/>
+            <a:r>
+              <a:rPr sz="1900" b="0">
+                <a:solidFill>
+                  <a:srgbClr val="222222"/>
+                </a:solidFill>
+                <a:latin typeface="Calibri"/>
+              </a:rPr>
+              <a:t>4. Compressed size: 5 pairs of two characters each = 10 characters, against 12 originally.</a:t>
+            </a:r>
+          </a:p>
+          <a:p>
+            <a:pPr lvl="1"/>
+            <a:r>
+              <a:rPr sz="1900" b="0">
+                <a:solidFill>
+                  <a:srgbClr val="222222"/>
+                </a:solidFill>
+                <a:latin typeface="Calibri"/>
+              </a:rPr>
+              <a:t>5. Saving: 2 characters, one sixth of the file; modest because two runs had length 1 and 2.</a:t>
+            </a:r>
+          </a:p>
+          <a:p>
+            <a:pPr lvl="1"/>
+            <a:r>
+              <a:rPr sz="1900" b="0">
+                <a:solidFill>
+                  <a:srgbClr val="222222"/>
+                </a:solidFill>
+                <a:latin typeface="Calibri"/>
+              </a:rPr>
+              <a:t>6. Contrast: ABABAB would encode as 1A 1B 1A 1B 1A 1B, growing from 6 to 12 characters.</a:t>
+            </a:r>
+          </a:p>
+        </p:txBody>
+      </p:sp>
+    </p:spTree>
+  </p:cSld>
+  <p:clrMapOvr>
+    <a:masterClrMapping/>
+  </p:clrMapOvr>
+</p:sld>
+</file>
+
+<file path=ppt/slides/slide17.xml><?xml version="1.0" encoding="utf-8"?>
+<p:sld xmlns:a="http://schemas.openxmlformats.org/drawingml/2006/main" xmlns:p="http://schemas.openxmlformats.org/presentationml/2006/main" xmlns:r="http://schemas.openxmlformats.org/officeDocument/2006/relationships">
+  <p:cSld>
+    <p:bg>
+      <p:bgPr>
+        <a:solidFill>
+          <a:srgbClr val="FFFFFF"/>
+        </a:solidFill>
+        <a:effectLst/>
+      </p:bgPr>
+    </p:bg>
+    <p:spTree>
+      <p:nvGrpSpPr>
+        <p:cNvPr id="1" name=""/>
+        <p:cNvGrpSpPr/>
+        <p:nvPr/>
+      </p:nvGrpSpPr>
+      <p:grpSpPr/>
+      <p:sp>
+        <p:nvSpPr>
+          <p:cNvPr id="2" name="TextBox 1"/>
+          <p:cNvSpPr txBox="1"/>
+          <p:nvPr/>
+        </p:nvSpPr>
+        <p:spPr>
+          <a:xfrm>
+            <a:off x="548640" y="274320"/>
+            <a:ext cx="11064240" cy="822960"/>
+          </a:xfrm>
+          <a:prstGeom prst="rect">
+            <a:avLst/>
+          </a:prstGeom>
+          <a:noFill/>
+        </p:spPr>
+        <p:txBody>
+          <a:bodyPr wrap="square">
+            <a:spAutoFit/>
+          </a:bodyPr>
+          <a:lstStyle/>
+          <a:p>
+            <a:r>
+              <a:rPr sz="3000" b="1" i="0">
+                <a:solidFill>
+                  <a:srgbClr val="2B6CB0"/>
+                </a:solidFill>
+                <a:latin typeface="Calibri"/>
+              </a:rPr>
+              <a:t>Worked example 2</a:t>
+            </a:r>
+          </a:p>
+        </p:txBody>
+      </p:sp>
+      <p:sp>
+        <p:nvSpPr>
+          <p:cNvPr id="3" name="TextBox 2"/>
+          <p:cNvSpPr txBox="1"/>
+          <p:nvPr/>
+        </p:nvSpPr>
+        <p:spPr>
+          <a:xfrm>
+            <a:off x="640080" y="1280160"/>
+            <a:ext cx="10881360" cy="5120640"/>
+          </a:xfrm>
+          <a:prstGeom prst="rect">
+            <a:avLst/>
+          </a:prstGeom>
+          <a:noFill/>
+        </p:spPr>
+        <p:txBody>
+          <a:bodyPr wrap="square">
+            <a:spAutoFit/>
+          </a:bodyPr>
+          <a:lstStyle/>
+          <a:p>
+            <a:pPr/>
+            <a:r>
+              <a:rPr sz="2200" b="1">
+                <a:solidFill>
+                  <a:srgbClr val="2B6CB0"/>
+                </a:solidFill>
+                <a:latin typeface="Calibri"/>
+              </a:rPr>
+              <a:t>Dictionary coding the cat and the dog and the rat</a:t>
+            </a:r>
+          </a:p>
+          <a:p>
+            <a:pPr lvl="1"/>
+            <a:r>
+              <a:rPr sz="1900" b="0">
+                <a:solidFill>
+                  <a:srgbClr val="222222"/>
+                </a:solidFill>
+                <a:latin typeface="Calibri"/>
+              </a:rPr>
+              <a:t>1. Original text: the cat and the dog and the rat, which is 24 letters plus 7 spaces = 31 characters.</a:t>
+            </a:r>
+          </a:p>
+          <a:p>
+            <a:pPr lvl="1"/>
+            <a:r>
+              <a:rPr sz="1900" b="0">
+                <a:solidFill>
+                  <a:srgbClr val="222222"/>
+                </a:solidFill>
+                <a:latin typeface="Calibri"/>
+              </a:rPr>
+              <a:t>2. Build the dictionary of distinct words: 1 = the, 2 = cat, 3 = and, 4 = dog, 5 = rat.</a:t>
+            </a:r>
+          </a:p>
+          <a:p>
+            <a:pPr lvl="1"/>
+            <a:r>
+              <a:rPr sz="1900" b="0">
+                <a:solidFill>
+                  <a:srgbClr val="222222"/>
+                </a:solidFill>
+                <a:latin typeface="Calibri"/>
+              </a:rPr>
+              <a:t>3. Replace each word with its reference: the token stream is 1 2 3 1 4 3 1 5.</a:t>
+            </a:r>
+          </a:p>
+          <a:p>
+            <a:pPr lvl="1"/>
+            <a:r>
+              <a:rPr sz="1900" b="0">
+                <a:solidFill>
+                  <a:srgbClr val="222222"/>
+                </a:solidFill>
+                <a:latin typeface="Calibri"/>
+              </a:rPr>
+              <a:t>4. Check by decoding: the, cat, and, the, dog, and, the, rat matches the original exactly.</a:t>
+            </a:r>
+          </a:p>
+          <a:p>
+            <a:pPr lvl="1"/>
+            <a:r>
+              <a:rPr sz="1900" b="0">
+                <a:solidFill>
+                  <a:srgbClr val="222222"/>
+                </a:solidFill>
+                <a:latin typeface="Calibri"/>
+              </a:rPr>
+              <a:t>5. Assuming one character per token, the stream is 8 characters, but the 5-entry dictionary must also be stored.</a:t>
+            </a:r>
+          </a:p>
+          <a:p>
+            <a:pPr lvl="1"/>
+            <a:r>
+              <a:rPr sz="1900" b="0">
+                <a:solidFill>
+                  <a:srgbClr val="222222"/>
+                </a:solidFill>
+                <a:latin typeface="Calibri"/>
+              </a:rPr>
+              <a:t>6. Conclusion: overhead makes savings small on tiny files, but references pay off as repeated words multiply.</a:t>
+            </a:r>
+          </a:p>
+        </p:txBody>
+      </p:sp>
+    </p:spTree>
+  </p:cSld>
+  <p:clrMapOvr>
+    <a:masterClrMapping/>
+  </p:clrMapOvr>
+</p:sld>
+</file>
+
+<file path=ppt/slides/slide18.xml><?xml version="1.0" encoding="utf-8"?>
+<p:sld xmlns:a="http://schemas.openxmlformats.org/drawingml/2006/main" xmlns:p="http://schemas.openxmlformats.org/presentationml/2006/main" xmlns:r="http://schemas.openxmlformats.org/officeDocument/2006/relationships">
+  <p:cSld>
+    <p:bg>
+      <p:bgPr>
+        <a:solidFill>
+          <a:srgbClr val="FFFFFF"/>
+        </a:solidFill>
+        <a:effectLst/>
+      </p:bgPr>
+    </p:bg>
+    <p:spTree>
+      <p:nvGrpSpPr>
+        <p:cNvPr id="1" name=""/>
+        <p:cNvGrpSpPr/>
+        <p:nvPr/>
+      </p:nvGrpSpPr>
+      <p:grpSpPr/>
+      <p:sp>
+        <p:nvSpPr>
+          <p:cNvPr id="2" name="TextBox 1"/>
+          <p:cNvSpPr txBox="1"/>
+          <p:nvPr/>
+        </p:nvSpPr>
+        <p:spPr>
+          <a:xfrm>
+            <a:off x="548640" y="274320"/>
+            <a:ext cx="11064240" cy="822960"/>
+          </a:xfrm>
+          <a:prstGeom prst="rect">
+            <a:avLst/>
+          </a:prstGeom>
+          <a:noFill/>
+        </p:spPr>
+        <p:txBody>
+          <a:bodyPr wrap="square">
+            <a:spAutoFit/>
+          </a:bodyPr>
+          <a:lstStyle/>
+          <a:p>
+            <a:r>
+              <a:rPr sz="3000" b="1" i="0">
+                <a:solidFill>
+                  <a:srgbClr val="2B6CB0"/>
+                </a:solidFill>
+                <a:latin typeface="Calibri"/>
+              </a:rPr>
+              <a:t>Worked example 3</a:t>
+            </a:r>
+          </a:p>
+        </p:txBody>
+      </p:sp>
+      <p:sp>
+        <p:nvSpPr>
+          <p:cNvPr id="3" name="TextBox 2"/>
+          <p:cNvSpPr txBox="1"/>
+          <p:nvPr/>
+        </p:nvSpPr>
+        <p:spPr>
+          <a:xfrm>
+            <a:off x="640080" y="1280160"/>
+            <a:ext cx="10881360" cy="5120640"/>
+          </a:xfrm>
+          <a:prstGeom prst="rect">
+            <a:avLst/>
+          </a:prstGeom>
+          <a:noFill/>
+        </p:spPr>
+        <p:txBody>
+          <a:bodyPr wrap="square">
+            <a:spAutoFit/>
+          </a:bodyPr>
+          <a:lstStyle/>
+          <a:p>
+            <a:pPr/>
+            <a:r>
+              <a:rPr sz="2200" b="1">
+                <a:solidFill>
+                  <a:srgbClr val="2B6CB0"/>
+                </a:solidFill>
+                <a:latin typeface="Calibri"/>
+              </a:rPr>
+              <a:t>Asymmetric encryption and a digital signature between Alia and Ben</a:t>
+            </a:r>
+          </a:p>
+          <a:p>
+            <a:pPr lvl="1"/>
+            <a:r>
+              <a:rPr sz="1900" b="0">
+                <a:solidFill>
+                  <a:srgbClr val="222222"/>
+                </a:solidFill>
+                <a:latin typeface="Calibri"/>
+              </a:rPr>
+              <a:t>1. Alia wants to send Ben a confidential contract that Ben can trust came from her.</a:t>
+            </a:r>
+          </a:p>
+          <a:p>
+            <a:pPr lvl="1"/>
+            <a:r>
+              <a:rPr sz="1900" b="0">
+                <a:solidFill>
+                  <a:srgbClr val="222222"/>
+                </a:solidFill>
+                <a:latin typeface="Calibri"/>
+              </a:rPr>
+              <a:t>2. Confidentiality: Alia encrypts the contract with Ben's public key, which anyone may hold.</a:t>
+            </a:r>
+          </a:p>
+          <a:p>
+            <a:pPr lvl="1"/>
+            <a:r>
+              <a:rPr sz="1900" b="0">
+                <a:solidFill>
+                  <a:srgbClr val="222222"/>
+                </a:solidFill>
+                <a:latin typeface="Calibri"/>
+              </a:rPr>
+              <a:t>3. Only Ben's private key can decrypt it, so interceptors see only ciphertext.</a:t>
+            </a:r>
+          </a:p>
+          <a:p>
+            <a:pPr lvl="1"/>
+            <a:r>
+              <a:rPr sz="1900" b="0">
+                <a:solidFill>
+                  <a:srgbClr val="222222"/>
+                </a:solidFill>
+                <a:latin typeface="Calibri"/>
+              </a:rPr>
+              <a:t>4. Signature: Alia hashes the contract and encrypts that hash with her own private key, attaching the result.</a:t>
+            </a:r>
+          </a:p>
+          <a:p>
+            <a:pPr lvl="1"/>
+            <a:r>
+              <a:rPr sz="1900" b="0">
+                <a:solidFill>
+                  <a:srgbClr val="222222"/>
+                </a:solidFill>
+                <a:latin typeface="Calibri"/>
+              </a:rPr>
+              <a:t>5. Ben decrypts the signature with Alia's public key, rehashes the received contract and compares the two hashes.</a:t>
+            </a:r>
+          </a:p>
+          <a:p>
+            <a:pPr lvl="1"/>
+            <a:r>
+              <a:rPr sz="1900" b="0">
+                <a:solidFill>
+                  <a:srgbClr val="222222"/>
+                </a:solidFill>
+                <a:latin typeface="Calibri"/>
+              </a:rPr>
+              <a:t>6. Matching hashes prove the message came from Alia's private key and was not altered in transit.</a:t>
+            </a:r>
+          </a:p>
+        </p:txBody>
+      </p:sp>
+    </p:spTree>
+  </p:cSld>
+  <p:clrMapOvr>
+    <a:masterClrMapping/>
+  </p:clrMapOvr>
+</p:sld>
+</file>
+
+<file path=ppt/slides/slide19.xml><?xml version="1.0" encoding="utf-8"?>
+<p:sld xmlns:a="http://schemas.openxmlformats.org/drawingml/2006/main" xmlns:p="http://schemas.openxmlformats.org/presentationml/2006/main" xmlns:r="http://schemas.openxmlformats.org/officeDocument/2006/relationships">
+  <p:cSld>
+    <p:bg>
+      <p:bgPr>
+        <a:solidFill>
+          <a:srgbClr val="FFFFFF"/>
+        </a:solidFill>
+        <a:effectLst/>
+      </p:bgPr>
+    </p:bg>
+    <p:spTree>
+      <p:nvGrpSpPr>
+        <p:cNvPr id="1" name=""/>
+        <p:cNvGrpSpPr/>
+        <p:nvPr/>
+      </p:nvGrpSpPr>
+      <p:grpSpPr/>
+      <p:sp>
+        <p:nvSpPr>
+          <p:cNvPr id="2" name="TextBox 1"/>
+          <p:cNvSpPr txBox="1"/>
+          <p:nvPr/>
+        </p:nvSpPr>
+        <p:spPr>
+          <a:xfrm>
+            <a:off x="548640" y="274320"/>
+            <a:ext cx="11064240" cy="822960"/>
+          </a:xfrm>
+          <a:prstGeom prst="rect">
+            <a:avLst/>
+          </a:prstGeom>
+          <a:noFill/>
+        </p:spPr>
+        <p:txBody>
+          <a:bodyPr wrap="square">
+            <a:spAutoFit/>
+          </a:bodyPr>
+          <a:lstStyle/>
+          <a:p>
+            <a:r>
+              <a:rPr sz="3000" b="1" i="0">
+                <a:solidFill>
+                  <a:srgbClr val="2B6CB0"/>
+                </a:solidFill>
+                <a:latin typeface="Calibri"/>
+              </a:rPr>
+              <a:t>Activity 1</a:t>
+            </a:r>
+          </a:p>
+        </p:txBody>
+      </p:sp>
+      <p:sp>
+        <p:nvSpPr>
+          <p:cNvPr id="3" name="TextBox 2"/>
+          <p:cNvSpPr txBox="1"/>
+          <p:nvPr/>
+        </p:nvSpPr>
+        <p:spPr>
+          <a:xfrm>
+            <a:off x="640080" y="1280160"/>
+            <a:ext cx="10881360" cy="5120640"/>
+          </a:xfrm>
+          <a:prstGeom prst="rect">
+            <a:avLst/>
+          </a:prstGeom>
+          <a:noFill/>
+        </p:spPr>
+        <p:txBody>
+          <a:bodyPr wrap="square">
+            <a:spAutoFit/>
+          </a:bodyPr>
+          <a:lstStyle/>
+          <a:p>
+            <a:pPr/>
+            <a:r>
+              <a:rPr sz="2200" b="1">
+                <a:solidFill>
+                  <a:srgbClr val="2B6CB0"/>
+                </a:solidFill>
+                <a:latin typeface="Calibri"/>
+              </a:rPr>
+              <a:t>Human run length encoding  (10 min)</a:t>
+            </a:r>
+          </a:p>
+          <a:p>
+            <a:pPr lvl="1"/>
+            <a:r>
+              <a:rPr sz="2000" b="0">
+                <a:solidFill>
+                  <a:srgbClr val="222222"/>
+                </a:solidFill>
+                <a:latin typeface="Calibri"/>
+              </a:rPr>
+              <a:t>Line up 17 students as a row of pixels: 6 holding A, then 3 holding B, then 8 holding C.</a:t>
+            </a:r>
+          </a:p>
+          <a:p>
+            <a:pPr lvl="1"/>
+            <a:r>
+              <a:rPr sz="2000" b="0">
+                <a:solidFill>
+                  <a:srgbClr val="222222"/>
+                </a:solidFill>
+                <a:latin typeface="Calibri"/>
+              </a:rPr>
+              <a:t>Ask how to describe the row to someone next door in the fewest characters; steer suggestions to RLE.</a:t>
+            </a:r>
+          </a:p>
+          <a:p>
+            <a:pPr lvl="1"/>
+            <a:r>
+              <a:rPr sz="2000" b="0">
+                <a:solidFill>
+                  <a:srgbClr val="222222"/>
+                </a:solidFill>
+                <a:latin typeface="Calibri"/>
+              </a:rPr>
+              <a:t>One student walks the line calling the encoding while a scribe writes it: A6 B3 C8, 17 characters described in 6.</a:t>
+            </a:r>
+          </a:p>
+          <a:p>
+            <a:pPr lvl="1"/>
+            <a:r>
+              <a:rPr sz="2000" b="0">
+                <a:solidFill>
+                  <a:srgbClr val="222222"/>
+                </a:solidFill>
+                <a:latin typeface="Calibri"/>
+              </a:rPr>
+              <a:t>Rearrange the same students into A B C A B C repeating and encode again.</a:t>
+            </a:r>
+          </a:p>
+          <a:p>
+            <a:pPr lvl="1"/>
+            <a:r>
+              <a:rPr sz="2000" b="0">
+                <a:solidFill>
+                  <a:srgbClr val="222222"/>
+                </a:solidFill>
+                <a:latin typeface="Calibri"/>
+              </a:rPr>
+              <a:t>Debrief: when does RLE shrink data and when does it inflate it?</a:t>
+            </a:r>
+          </a:p>
+          <a:p>
+            <a:pPr/>
+            <a:r>
+              <a:rPr sz="1800" b="0">
                 <a:solidFill>
                   <a:srgbClr val="B76E00"/>
                 </a:solidFill>
                 <a:latin typeface="Calibri"/>
               </a:rPr>
-              <a:t>Answer: Hashing is one-way so the original password cannot be retrieved even if the database is stolen; the system only ever compares hashes, whereas encryption is reversible with a key.</a:t>
-            </a:r>
-          </a:p>
-          <a:p>
-            <a:r>
-              <a:rPr sz="2200" b="1">
-                <a:solidFill>
-                  <a:srgbClr val="222222"/>
-                </a:solidFill>
-                <a:latin typeface="Calibri"/>
-              </a:rPr>
-              <a:t>2. State two properties of a good hash function.</a:t>
-            </a:r>
-          </a:p>
-          <a:p>
-            <a:pPr lvl="1"/>
-            <a:r>
-              <a:rPr sz="1800" i="1">
-                <a:solidFill>
-                  <a:srgbClr val="B76E00"/>
-                </a:solidFill>
-                <a:latin typeface="Calibri"/>
-              </a:rPr>
-              <a:t>Answer: Any two of: one-way/not reversible, deterministic, few collisions, fast to compute, fixed-length output.</a:t>
-            </a:r>
-          </a:p>
-          <a:p>
-            <a:r>
-              <a:rPr sz="2200" b="1">
-                <a:solidFill>
-                  <a:srgbClr val="222222"/>
-                </a:solidFill>
-                <a:latin typeface="Calibri"/>
-              </a:rPr>
-              <a:t>3. How does asymmetric encryption let two strangers exchange data securely?</a:t>
-            </a:r>
-          </a:p>
-          <a:p>
-            <a:pPr lvl="1"/>
-            <a:r>
-              <a:rPr sz="1800" i="1">
-                <a:solidFill>
-                  <a:srgbClr val="B76E00"/>
-                </a:solidFill>
-                <a:latin typeface="Calibri"/>
-              </a:rPr>
-              <a:t>Answer: The public key can be shared openly so no secret key is exchanged in advance, and only the matching private key (kept secret) can decrypt, so an intercepted public key or ciphertext is useless.</a:t>
+              <a:t>Stretch: Encode the alternating row with dictionary coding instead, storing the pattern ABC once and referencing it, and compare which technique wins on each row.</a:t>
             </a:r>
           </a:p>
         </p:txBody>
@@ -3866,7 +4808,7 @@
                 </a:solidFill>
                 <a:latin typeface="Calibri"/>
               </a:rPr>
-              <a:t>Compare lossy and lossless compression and explain how run length encoding (RLE) and dictionary compression reduce file size.</a:t>
+              <a:t>Explain why files are compressed and compare lossy with lossless compression for given scenarios.</a:t>
             </a:r>
           </a:p>
           <a:p>
@@ -3878,7 +4820,7 @@
                 </a:solidFill>
                 <a:latin typeface="Calibri"/>
               </a:rPr>
-              <a:t>Distinguish symmetric and asymmetric encryption and explain how asymmetric encryption solves the key-distribution problem.</a:t>
+              <a:t>Encode and decode data using run length encoding and dictionary coding, and evaluate the saving.</a:t>
             </a:r>
           </a:p>
           <a:p>
@@ -3890,7 +4832,1477 @@
                 </a:solidFill>
                 <a:latin typeface="Calibri"/>
               </a:rPr>
-              <a:t>Explain what hashing is, its key properties and why hashing (not encryption) is used to store passwords.</a:t>
+              <a:t>Compare symmetric and asymmetric encryption, including keys, speed and the key distribution problem.</a:t>
+            </a:r>
+          </a:p>
+          <a:p>
+            <a:pPr lvl="1"/>
+            <a:r>
+              <a:rPr sz="2200" b="0">
+                <a:solidFill>
+                  <a:srgbClr val="222222"/>
+                </a:solidFill>
+                <a:latin typeface="Calibri"/>
+              </a:rPr>
+              <a:t>Describe the properties of hashing and justify its use for passwords and fast lookup.</a:t>
+            </a:r>
+          </a:p>
+        </p:txBody>
+      </p:sp>
+    </p:spTree>
+  </p:cSld>
+  <p:clrMapOvr>
+    <a:masterClrMapping/>
+  </p:clrMapOvr>
+</p:sld>
+</file>
+
+<file path=ppt/slides/slide20.xml><?xml version="1.0" encoding="utf-8"?>
+<p:sld xmlns:a="http://schemas.openxmlformats.org/drawingml/2006/main" xmlns:p="http://schemas.openxmlformats.org/presentationml/2006/main" xmlns:r="http://schemas.openxmlformats.org/officeDocument/2006/relationships">
+  <p:cSld>
+    <p:bg>
+      <p:bgPr>
+        <a:solidFill>
+          <a:srgbClr val="FFFFFF"/>
+        </a:solidFill>
+        <a:effectLst/>
+      </p:bgPr>
+    </p:bg>
+    <p:spTree>
+      <p:nvGrpSpPr>
+        <p:cNvPr id="1" name=""/>
+        <p:cNvGrpSpPr/>
+        <p:nvPr/>
+      </p:nvGrpSpPr>
+      <p:grpSpPr/>
+      <p:sp>
+        <p:nvSpPr>
+          <p:cNvPr id="2" name="TextBox 1"/>
+          <p:cNvSpPr txBox="1"/>
+          <p:nvPr/>
+        </p:nvSpPr>
+        <p:spPr>
+          <a:xfrm>
+            <a:off x="548640" y="274320"/>
+            <a:ext cx="11064240" cy="822960"/>
+          </a:xfrm>
+          <a:prstGeom prst="rect">
+            <a:avLst/>
+          </a:prstGeom>
+          <a:noFill/>
+        </p:spPr>
+        <p:txBody>
+          <a:bodyPr wrap="square">
+            <a:spAutoFit/>
+          </a:bodyPr>
+          <a:lstStyle/>
+          <a:p>
+            <a:r>
+              <a:rPr sz="3000" b="1" i="0">
+                <a:solidFill>
+                  <a:srgbClr val="2B6CB0"/>
+                </a:solidFill>
+                <a:latin typeface="Calibri"/>
+              </a:rPr>
+              <a:t>Activity 2</a:t>
+            </a:r>
+          </a:p>
+        </p:txBody>
+      </p:sp>
+      <p:sp>
+        <p:nvSpPr>
+          <p:cNvPr id="3" name="TextBox 2"/>
+          <p:cNvSpPr txBox="1"/>
+          <p:nvPr/>
+        </p:nvSpPr>
+        <p:spPr>
+          <a:xfrm>
+            <a:off x="640080" y="1280160"/>
+            <a:ext cx="10881360" cy="5120640"/>
+          </a:xfrm>
+          <a:prstGeom prst="rect">
+            <a:avLst/>
+          </a:prstGeom>
+          <a:noFill/>
+        </p:spPr>
+        <p:txBody>
+          <a:bodyPr wrap="square">
+            <a:spAutoFit/>
+          </a:bodyPr>
+          <a:lstStyle/>
+          <a:p>
+            <a:pPr/>
+            <a:r>
+              <a:rPr sz="2200" b="1">
+                <a:solidFill>
+                  <a:srgbClr val="2B6CB0"/>
+                </a:solidFill>
+                <a:latin typeface="Calibri"/>
+              </a:rPr>
+              <a:t>Padlocks and Caesar wheels: symmetric vs asymmetric  (15 min)</a:t>
+            </a:r>
+          </a:p>
+          <a:p>
+            <a:pPr lvl="1"/>
+            <a:r>
+              <a:rPr sz="2000" b="0">
+                <a:solidFill>
+                  <a:srgbClr val="222222"/>
+                </a:solidFill>
+                <a:latin typeface="Calibri"/>
+              </a:rPr>
+              <a:t>Symmetric round: Alia and Ben share the key shift plus 3; Alia encrypts REVISE to UHYLVH on a whiteboard and passes it through interceptor students, and Ben shifts back to decrypt.</a:t>
+            </a:r>
+          </a:p>
+          <a:p>
+            <a:pPr lvl="1"/>
+            <a:r>
+              <a:rPr sz="2000" b="0">
+                <a:solidFill>
+                  <a:srgbClr val="222222"/>
+                </a:solidFill>
+                <a:latin typeface="Calibri"/>
+              </a:rPr>
+              <a:t>Ask the interceptors what they saw, then the killer question: how could Alia and Ben have agreed the key without the interceptors hearing? Name the key distribution problem.</a:t>
+            </a:r>
+          </a:p>
+          <a:p>
+            <a:pPr lvl="1"/>
+            <a:r>
+              <a:rPr sz="2000" b="0">
+                <a:solidFill>
+                  <a:srgbClr val="222222"/>
+                </a:solidFill>
+                <a:latin typeface="Calibri"/>
+              </a:rPr>
+              <a:t>Asymmetric round: Ben hands out open padlocked boxes labelled his public key but keeps the only key in his pocket; Alia locks her message in a box and sends it through the same interceptors.</a:t>
+            </a:r>
+          </a:p>
+          <a:p>
+            <a:pPr lvl="1"/>
+            <a:r>
+              <a:rPr sz="2000" b="0">
+                <a:solidFill>
+                  <a:srgbClr val="222222"/>
+                </a:solidFill>
+                <a:latin typeface="Calibri"/>
+              </a:rPr>
+              <a:t>Debrief: same key both ways is symmetric, fast but with the distribution problem; public key locks and private key unlocks is asymmetric, slower but distribution is solved.</a:t>
+            </a:r>
+          </a:p>
+          <a:p>
+            <a:pPr lvl="1"/>
+            <a:r>
+              <a:rPr sz="2000" b="0">
+                <a:solidFill>
+                  <a:srgbClr val="222222"/>
+                </a:solidFill>
+                <a:latin typeface="Calibri"/>
+              </a:rPr>
+              <a:t>Finish by explaining HTTPS: asymmetric encryption shares a symmetric session key, then symmetric handles the bulk data for speed.</a:t>
+            </a:r>
+          </a:p>
+          <a:p>
+            <a:pPr/>
+            <a:r>
+              <a:rPr sz="1800" b="0">
+                <a:solidFill>
+                  <a:srgbClr val="B76E00"/>
+                </a:solidFill>
+                <a:latin typeface="Calibri"/>
+              </a:rPr>
+              <a:t>Stretch: Ask how Ben could prove a message really came from him: sign with his private key so anyone can verify with his public key, a digital signature.</a:t>
+            </a:r>
+          </a:p>
+        </p:txBody>
+      </p:sp>
+    </p:spTree>
+  </p:cSld>
+  <p:clrMapOvr>
+    <a:masterClrMapping/>
+  </p:clrMapOvr>
+</p:sld>
+</file>
+
+<file path=ppt/slides/slide21.xml><?xml version="1.0" encoding="utf-8"?>
+<p:sld xmlns:a="http://schemas.openxmlformats.org/drawingml/2006/main" xmlns:p="http://schemas.openxmlformats.org/presentationml/2006/main" xmlns:r="http://schemas.openxmlformats.org/officeDocument/2006/relationships">
+  <p:cSld>
+    <p:bg>
+      <p:bgPr>
+        <a:solidFill>
+          <a:srgbClr val="FFFFFF"/>
+        </a:solidFill>
+        <a:effectLst/>
+      </p:bgPr>
+    </p:bg>
+    <p:spTree>
+      <p:nvGrpSpPr>
+        <p:cNvPr id="1" name=""/>
+        <p:cNvGrpSpPr/>
+        <p:nvPr/>
+      </p:nvGrpSpPr>
+      <p:grpSpPr/>
+      <p:sp>
+        <p:nvSpPr>
+          <p:cNvPr id="2" name="TextBox 1"/>
+          <p:cNvSpPr txBox="1"/>
+          <p:nvPr/>
+        </p:nvSpPr>
+        <p:spPr>
+          <a:xfrm>
+            <a:off x="548640" y="274320"/>
+            <a:ext cx="11064240" cy="822960"/>
+          </a:xfrm>
+          <a:prstGeom prst="rect">
+            <a:avLst/>
+          </a:prstGeom>
+          <a:noFill/>
+        </p:spPr>
+        <p:txBody>
+          <a:bodyPr wrap="square">
+            <a:spAutoFit/>
+          </a:bodyPr>
+          <a:lstStyle/>
+          <a:p>
+            <a:r>
+              <a:rPr sz="3000" b="1" i="0">
+                <a:solidFill>
+                  <a:srgbClr val="2B6CB0"/>
+                </a:solidFill>
+                <a:latin typeface="Calibri"/>
+              </a:rPr>
+              <a:t>Activity 3</a:t>
+            </a:r>
+          </a:p>
+        </p:txBody>
+      </p:sp>
+      <p:sp>
+        <p:nvSpPr>
+          <p:cNvPr id="3" name="TextBox 2"/>
+          <p:cNvSpPr txBox="1"/>
+          <p:nvPr/>
+        </p:nvSpPr>
+        <p:spPr>
+          <a:xfrm>
+            <a:off x="640080" y="1280160"/>
+            <a:ext cx="10881360" cy="5120640"/>
+          </a:xfrm>
+          <a:prstGeom prst="rect">
+            <a:avLst/>
+          </a:prstGeom>
+          <a:noFill/>
+        </p:spPr>
+        <p:txBody>
+          <a:bodyPr wrap="square">
+            <a:spAutoFit/>
+          </a:bodyPr>
+          <a:lstStyle/>
+          <a:p>
+            <a:pPr/>
+            <a:r>
+              <a:rPr sz="2200" b="1">
+                <a:solidFill>
+                  <a:srgbClr val="2B6CB0"/>
+                </a:solidFill>
+                <a:latin typeface="Calibri"/>
+              </a:rPr>
+              <a:t>One-way street: human hash function  (10 min)</a:t>
+            </a:r>
+          </a:p>
+          <a:p>
+            <a:pPr lvl="1"/>
+            <a:r>
+              <a:rPr sz="2000" b="0">
+                <a:solidFill>
+                  <a:srgbClr val="222222"/>
+                </a:solidFill>
+                <a:latin typeface="Calibri"/>
+              </a:rPr>
+              <a:t>Define a toy hash on the board: hash(word) = number of letters MOD 5.</a:t>
+            </a:r>
+          </a:p>
+          <a:p>
+            <a:pPr lvl="1"/>
+            <a:r>
+              <a:rPr sz="2000" b="0">
+                <a:solidFill>
+                  <a:srgbClr val="222222"/>
+                </a:solidFill>
+                <a:latin typeface="Calibri"/>
+              </a:rPr>
+              <a:t>Students hash their own first name on mini-whiteboards and hold up the digit.</a:t>
+            </a:r>
+          </a:p>
+          <a:p>
+            <a:pPr lvl="1"/>
+            <a:r>
+              <a:rPr sz="2000" b="0">
+                <a:solidFill>
+                  <a:srgbClr val="222222"/>
+                </a:solidFill>
+                <a:latin typeface="Calibri"/>
+              </a:rPr>
+              <a:t>Ask: I am thinking of a word whose hash is 1; what was my word? Impossible: hashing is one-way.</a:t>
+            </a:r>
+          </a:p>
+          <a:p>
+            <a:pPr lvl="1"/>
+            <a:r>
+              <a:rPr sz="2000" b="0">
+                <a:solidFill>
+                  <a:srgbClr val="222222"/>
+                </a:solidFill>
+                <a:latin typeface="Calibri"/>
+              </a:rPr>
+              <a:t>Find two students with the same hash but different names and name it a collision.</a:t>
+            </a:r>
+          </a:p>
+          <a:p>
+            <a:pPr lvl="1"/>
+            <a:r>
+              <a:rPr sz="2000" b="0">
+                <a:solidFill>
+                  <a:srgbClr val="222222"/>
+                </a:solidFill>
+                <a:latin typeface="Calibri"/>
+              </a:rPr>
+              <a:t>Debrief which properties of a good hash the toy has, deterministic, fixed output, fast, and which it lacks, far too many collisions; link to password storage and hash tables.</a:t>
+            </a:r>
+          </a:p>
+          <a:p>
+            <a:pPr/>
+            <a:r>
+              <a:rPr sz="1800" b="0">
+                <a:solidFill>
+                  <a:srgbClr val="B76E00"/>
+                </a:solidFill>
+                <a:latin typeface="Calibri"/>
+              </a:rPr>
+              <a:t>Stretch: Ask why systems hash passwords rather than encrypting them: there is no key to steal and even an administrator with the database cannot reverse the hashes.</a:t>
+            </a:r>
+          </a:p>
+        </p:txBody>
+      </p:sp>
+    </p:spTree>
+  </p:cSld>
+  <p:clrMapOvr>
+    <a:masterClrMapping/>
+  </p:clrMapOvr>
+</p:sld>
+</file>
+
+<file path=ppt/slides/slide22.xml><?xml version="1.0" encoding="utf-8"?>
+<p:sld xmlns:a="http://schemas.openxmlformats.org/drawingml/2006/main" xmlns:p="http://schemas.openxmlformats.org/presentationml/2006/main" xmlns:r="http://schemas.openxmlformats.org/officeDocument/2006/relationships">
+  <p:cSld>
+    <p:bg>
+      <p:bgPr>
+        <a:solidFill>
+          <a:srgbClr val="FFFFFF"/>
+        </a:solidFill>
+        <a:effectLst/>
+      </p:bgPr>
+    </p:bg>
+    <p:spTree>
+      <p:nvGrpSpPr>
+        <p:cNvPr id="1" name=""/>
+        <p:cNvGrpSpPr/>
+        <p:nvPr/>
+      </p:nvGrpSpPr>
+      <p:grpSpPr/>
+      <p:sp>
+        <p:nvSpPr>
+          <p:cNvPr id="2" name="TextBox 1"/>
+          <p:cNvSpPr txBox="1"/>
+          <p:nvPr/>
+        </p:nvSpPr>
+        <p:spPr>
+          <a:xfrm>
+            <a:off x="548640" y="274320"/>
+            <a:ext cx="11064240" cy="822960"/>
+          </a:xfrm>
+          <a:prstGeom prst="rect">
+            <a:avLst/>
+          </a:prstGeom>
+          <a:noFill/>
+        </p:spPr>
+        <p:txBody>
+          <a:bodyPr wrap="square">
+            <a:spAutoFit/>
+          </a:bodyPr>
+          <a:lstStyle/>
+          <a:p>
+            <a:r>
+              <a:rPr sz="3000" b="1" i="0">
+                <a:solidFill>
+                  <a:srgbClr val="2B6CB0"/>
+                </a:solidFill>
+                <a:latin typeface="Calibri"/>
+              </a:rPr>
+              <a:t>Practice (1-4)</a:t>
+            </a:r>
+          </a:p>
+        </p:txBody>
+      </p:sp>
+      <p:sp>
+        <p:nvSpPr>
+          <p:cNvPr id="3" name="TextBox 2"/>
+          <p:cNvSpPr txBox="1"/>
+          <p:nvPr/>
+        </p:nvSpPr>
+        <p:spPr>
+          <a:xfrm>
+            <a:off x="640080" y="1280160"/>
+            <a:ext cx="10881360" cy="5120640"/>
+          </a:xfrm>
+          <a:prstGeom prst="rect">
+            <a:avLst/>
+          </a:prstGeom>
+          <a:noFill/>
+        </p:spPr>
+        <p:txBody>
+          <a:bodyPr wrap="square">
+            <a:spAutoFit/>
+          </a:bodyPr>
+          <a:lstStyle/>
+          <a:p>
+            <a:r>
+              <a:rPr sz="2000" b="1">
+                <a:solidFill>
+                  <a:srgbClr val="222222"/>
+                </a:solidFill>
+                <a:latin typeface="Calibri"/>
+              </a:rPr>
+              <a:t>1. A pixel row reads WWWWWBBWWWWWW. Show the result of run length encoding it and state the saving. (3)</a:t>
+            </a:r>
+          </a:p>
+          <a:p>
+            <a:r>
+              <a:rPr sz="2000" b="1">
+                <a:solidFill>
+                  <a:srgbClr val="222222"/>
+                </a:solidFill>
+                <a:latin typeface="Calibri"/>
+              </a:rPr>
+              <a:t>2. Explain why run length encoding could increase the size of some files. (2)</a:t>
+            </a:r>
+          </a:p>
+          <a:p>
+            <a:r>
+              <a:rPr sz="2000" b="1">
+                <a:solidFill>
+                  <a:srgbClr val="222222"/>
+                </a:solidFill>
+                <a:latin typeface="Calibri"/>
+              </a:rPr>
+              <a:t>3. A photographer emails proof images to clients, and a developer backs up source code. Justify a suitable compression type for each. (4)</a:t>
+            </a:r>
+          </a:p>
+          <a:p>
+            <a:r>
+              <a:rPr sz="2000" b="1">
+                <a:solidFill>
+                  <a:srgbClr val="222222"/>
+                </a:solidFill>
+                <a:latin typeface="Calibri"/>
+              </a:rPr>
+              <a:t>4. Describe how dictionary coding compresses a text file. (3)</a:t>
+            </a:r>
+          </a:p>
+        </p:txBody>
+      </p:sp>
+    </p:spTree>
+  </p:cSld>
+  <p:clrMapOvr>
+    <a:masterClrMapping/>
+  </p:clrMapOvr>
+</p:sld>
+</file>
+
+<file path=ppt/slides/slide23.xml><?xml version="1.0" encoding="utf-8"?>
+<p:sld xmlns:a="http://schemas.openxmlformats.org/drawingml/2006/main" xmlns:p="http://schemas.openxmlformats.org/presentationml/2006/main" xmlns:r="http://schemas.openxmlformats.org/officeDocument/2006/relationships">
+  <p:cSld>
+    <p:bg>
+      <p:bgPr>
+        <a:solidFill>
+          <a:srgbClr val="FFFFFF"/>
+        </a:solidFill>
+        <a:effectLst/>
+      </p:bgPr>
+    </p:bg>
+    <p:spTree>
+      <p:nvGrpSpPr>
+        <p:cNvPr id="1" name=""/>
+        <p:cNvGrpSpPr/>
+        <p:nvPr/>
+      </p:nvGrpSpPr>
+      <p:grpSpPr/>
+      <p:sp>
+        <p:nvSpPr>
+          <p:cNvPr id="2" name="TextBox 1"/>
+          <p:cNvSpPr txBox="1"/>
+          <p:nvPr/>
+        </p:nvSpPr>
+        <p:spPr>
+          <a:xfrm>
+            <a:off x="548640" y="274320"/>
+            <a:ext cx="11064240" cy="822960"/>
+          </a:xfrm>
+          <a:prstGeom prst="rect">
+            <a:avLst/>
+          </a:prstGeom>
+          <a:noFill/>
+        </p:spPr>
+        <p:txBody>
+          <a:bodyPr wrap="square">
+            <a:spAutoFit/>
+          </a:bodyPr>
+          <a:lstStyle/>
+          <a:p>
+            <a:r>
+              <a:rPr sz="3000" b="1" i="0">
+                <a:solidFill>
+                  <a:srgbClr val="2B6CB0"/>
+                </a:solidFill>
+                <a:latin typeface="Calibri"/>
+              </a:rPr>
+              <a:t>Practice — answers (1-4)</a:t>
+            </a:r>
+          </a:p>
+        </p:txBody>
+      </p:sp>
+      <p:sp>
+        <p:nvSpPr>
+          <p:cNvPr id="3" name="TextBox 2"/>
+          <p:cNvSpPr txBox="1"/>
+          <p:nvPr/>
+        </p:nvSpPr>
+        <p:spPr>
+          <a:xfrm>
+            <a:off x="640080" y="1280160"/>
+            <a:ext cx="10881360" cy="5120640"/>
+          </a:xfrm>
+          <a:prstGeom prst="rect">
+            <a:avLst/>
+          </a:prstGeom>
+          <a:noFill/>
+        </p:spPr>
+        <p:txBody>
+          <a:bodyPr wrap="square">
+            <a:spAutoFit/>
+          </a:bodyPr>
+          <a:lstStyle/>
+          <a:p>
+            <a:r>
+              <a:rPr sz="2000" b="1">
+                <a:solidFill>
+                  <a:srgbClr val="222222"/>
+                </a:solidFill>
+                <a:latin typeface="Calibri"/>
+              </a:rPr>
+              <a:t>1. A pixel row reads WWWWWBBWWWWWW. Show the result of run length encoding it and state the saving. (3)</a:t>
+            </a:r>
+          </a:p>
+          <a:p>
+            <a:pPr lvl="1"/>
+            <a:r>
+              <a:rPr sz="1800" i="1">
+                <a:solidFill>
+                  <a:srgbClr val="B76E00"/>
+                </a:solidFill>
+                <a:latin typeface="Calibri"/>
+              </a:rPr>
+              <a:t>Answer: Runs are 5 W, 2 B, 6 W (1); encoded as 5W 2B 6W (1); 6 characters instead of 13, saving 7 characters (1).</a:t>
+            </a:r>
+          </a:p>
+          <a:p>
+            <a:r>
+              <a:rPr sz="2000" b="1">
+                <a:solidFill>
+                  <a:srgbClr val="222222"/>
+                </a:solidFill>
+                <a:latin typeface="Calibri"/>
+              </a:rPr>
+              <a:t>2. Explain why run length encoding could increase the size of some files. (2)</a:t>
+            </a:r>
+          </a:p>
+          <a:p>
+            <a:pPr lvl="1"/>
+            <a:r>
+              <a:rPr sz="1800" i="1">
+                <a:solidFill>
+                  <a:srgbClr val="B76E00"/>
+                </a:solidFill>
+                <a:latin typeface="Calibri"/>
+              </a:rPr>
+              <a:t>Answer: RLE stores a count and value for every run (1); if runs are mostly length one, each single character becomes a two-character pair, up to doubling the file (1).</a:t>
+            </a:r>
+          </a:p>
+          <a:p>
+            <a:r>
+              <a:rPr sz="2000" b="1">
+                <a:solidFill>
+                  <a:srgbClr val="222222"/>
+                </a:solidFill>
+                <a:latin typeface="Calibri"/>
+              </a:rPr>
+              <a:t>3. A photographer emails proof images to clients, and a developer backs up source code. Justify a suitable compression type for each. (4)</a:t>
+            </a:r>
+          </a:p>
+          <a:p>
+            <a:pPr lvl="1"/>
+            <a:r>
+              <a:rPr sz="1800" i="1">
+                <a:solidFill>
+                  <a:srgbClr val="B76E00"/>
+                </a:solidFill>
+                <a:latin typeface="Calibri"/>
+              </a:rPr>
+              <a:t>Answer: Photos: lossy (1), because large savings speed the email and small quality losses are invisible to clients (1). Source code: lossless (1), because every character must be recovered exactly or the program will not run (1).</a:t>
+            </a:r>
+          </a:p>
+          <a:p>
+            <a:r>
+              <a:rPr sz="2000" b="1">
+                <a:solidFill>
+                  <a:srgbClr val="222222"/>
+                </a:solidFill>
+                <a:latin typeface="Calibri"/>
+              </a:rPr>
+              <a:t>4. Describe how dictionary coding compresses a text file. (3)</a:t>
+            </a:r>
+          </a:p>
+          <a:p>
+            <a:pPr lvl="1"/>
+            <a:r>
+              <a:rPr sz="1800" i="1">
+                <a:solidFill>
+                  <a:srgbClr val="B76E00"/>
+                </a:solidFill>
+                <a:latin typeface="Calibri"/>
+              </a:rPr>
+              <a:t>Answer: Repeated words or patterns are stored once in a dictionary (1); each occurrence is replaced by a short reference to its entry (1); the dictionary is stored with the file so decompression can substitute entries back exactly (1).</a:t>
+            </a:r>
+          </a:p>
+        </p:txBody>
+      </p:sp>
+    </p:spTree>
+  </p:cSld>
+  <p:clrMapOvr>
+    <a:masterClrMapping/>
+  </p:clrMapOvr>
+</p:sld>
+</file>
+
+<file path=ppt/slides/slide24.xml><?xml version="1.0" encoding="utf-8"?>
+<p:sld xmlns:a="http://schemas.openxmlformats.org/drawingml/2006/main" xmlns:p="http://schemas.openxmlformats.org/presentationml/2006/main" xmlns:r="http://schemas.openxmlformats.org/officeDocument/2006/relationships">
+  <p:cSld>
+    <p:bg>
+      <p:bgPr>
+        <a:solidFill>
+          <a:srgbClr val="FFFFFF"/>
+        </a:solidFill>
+        <a:effectLst/>
+      </p:bgPr>
+    </p:bg>
+    <p:spTree>
+      <p:nvGrpSpPr>
+        <p:cNvPr id="1" name=""/>
+        <p:cNvGrpSpPr/>
+        <p:nvPr/>
+      </p:nvGrpSpPr>
+      <p:grpSpPr/>
+      <p:sp>
+        <p:nvSpPr>
+          <p:cNvPr id="2" name="TextBox 1"/>
+          <p:cNvSpPr txBox="1"/>
+          <p:nvPr/>
+        </p:nvSpPr>
+        <p:spPr>
+          <a:xfrm>
+            <a:off x="548640" y="274320"/>
+            <a:ext cx="11064240" cy="822960"/>
+          </a:xfrm>
+          <a:prstGeom prst="rect">
+            <a:avLst/>
+          </a:prstGeom>
+          <a:noFill/>
+        </p:spPr>
+        <p:txBody>
+          <a:bodyPr wrap="square">
+            <a:spAutoFit/>
+          </a:bodyPr>
+          <a:lstStyle/>
+          <a:p>
+            <a:r>
+              <a:rPr sz="3000" b="1" i="0">
+                <a:solidFill>
+                  <a:srgbClr val="2B6CB0"/>
+                </a:solidFill>
+                <a:latin typeface="Calibri"/>
+              </a:rPr>
+              <a:t>Practice (5-8)</a:t>
+            </a:r>
+          </a:p>
+        </p:txBody>
+      </p:sp>
+      <p:sp>
+        <p:nvSpPr>
+          <p:cNvPr id="3" name="TextBox 2"/>
+          <p:cNvSpPr txBox="1"/>
+          <p:nvPr/>
+        </p:nvSpPr>
+        <p:spPr>
+          <a:xfrm>
+            <a:off x="640080" y="1280160"/>
+            <a:ext cx="10881360" cy="5120640"/>
+          </a:xfrm>
+          <a:prstGeom prst="rect">
+            <a:avLst/>
+          </a:prstGeom>
+          <a:noFill/>
+        </p:spPr>
+        <p:txBody>
+          <a:bodyPr wrap="square">
+            <a:spAutoFit/>
+          </a:bodyPr>
+          <a:lstStyle/>
+          <a:p>
+            <a:r>
+              <a:rPr sz="2000" b="1">
+                <a:solidFill>
+                  <a:srgbClr val="222222"/>
+                </a:solidFill>
+                <a:latin typeface="Calibri"/>
+              </a:rPr>
+              <a:t>1. Compare symmetric and asymmetric encryption. (4)</a:t>
+            </a:r>
+          </a:p>
+          <a:p>
+            <a:r>
+              <a:rPr sz="2000" b="1">
+                <a:solidFill>
+                  <a:srgbClr val="222222"/>
+                </a:solidFill>
+                <a:latin typeface="Calibri"/>
+              </a:rPr>
+              <a:t>2. Ben receives a message with a digital signature. Explain how he verifies who sent it and that it is unchanged. (3)</a:t>
+            </a:r>
+          </a:p>
+          <a:p>
+            <a:r>
+              <a:rPr sz="2000" b="1">
+                <a:solidFill>
+                  <a:srgbClr val="222222"/>
+                </a:solidFill>
+                <a:latin typeface="Calibri"/>
+              </a:rPr>
+              <a:t>3. Explain why an online store should hash rather than encrypt its customers' passwords. (3)</a:t>
+            </a:r>
+          </a:p>
+          <a:p>
+            <a:r>
+              <a:rPr sz="2000" b="1">
+                <a:solidFill>
+                  <a:srgbClr val="222222"/>
+                </a:solidFill>
+                <a:latin typeface="Calibri"/>
+              </a:rPr>
+              <a:t>4. State two properties of a good hash function. (2)</a:t>
+            </a:r>
+          </a:p>
+        </p:txBody>
+      </p:sp>
+    </p:spTree>
+  </p:cSld>
+  <p:clrMapOvr>
+    <a:masterClrMapping/>
+  </p:clrMapOvr>
+</p:sld>
+</file>
+
+<file path=ppt/slides/slide25.xml><?xml version="1.0" encoding="utf-8"?>
+<p:sld xmlns:a="http://schemas.openxmlformats.org/drawingml/2006/main" xmlns:p="http://schemas.openxmlformats.org/presentationml/2006/main" xmlns:r="http://schemas.openxmlformats.org/officeDocument/2006/relationships">
+  <p:cSld>
+    <p:bg>
+      <p:bgPr>
+        <a:solidFill>
+          <a:srgbClr val="FFFFFF"/>
+        </a:solidFill>
+        <a:effectLst/>
+      </p:bgPr>
+    </p:bg>
+    <p:spTree>
+      <p:nvGrpSpPr>
+        <p:cNvPr id="1" name=""/>
+        <p:cNvGrpSpPr/>
+        <p:nvPr/>
+      </p:nvGrpSpPr>
+      <p:grpSpPr/>
+      <p:sp>
+        <p:nvSpPr>
+          <p:cNvPr id="2" name="TextBox 1"/>
+          <p:cNvSpPr txBox="1"/>
+          <p:nvPr/>
+        </p:nvSpPr>
+        <p:spPr>
+          <a:xfrm>
+            <a:off x="548640" y="274320"/>
+            <a:ext cx="11064240" cy="822960"/>
+          </a:xfrm>
+          <a:prstGeom prst="rect">
+            <a:avLst/>
+          </a:prstGeom>
+          <a:noFill/>
+        </p:spPr>
+        <p:txBody>
+          <a:bodyPr wrap="square">
+            <a:spAutoFit/>
+          </a:bodyPr>
+          <a:lstStyle/>
+          <a:p>
+            <a:r>
+              <a:rPr sz="3000" b="1" i="0">
+                <a:solidFill>
+                  <a:srgbClr val="2B6CB0"/>
+                </a:solidFill>
+                <a:latin typeface="Calibri"/>
+              </a:rPr>
+              <a:t>Practice — answers (5-8)</a:t>
+            </a:r>
+          </a:p>
+        </p:txBody>
+      </p:sp>
+      <p:sp>
+        <p:nvSpPr>
+          <p:cNvPr id="3" name="TextBox 2"/>
+          <p:cNvSpPr txBox="1"/>
+          <p:nvPr/>
+        </p:nvSpPr>
+        <p:spPr>
+          <a:xfrm>
+            <a:off x="640080" y="1280160"/>
+            <a:ext cx="10881360" cy="5120640"/>
+          </a:xfrm>
+          <a:prstGeom prst="rect">
+            <a:avLst/>
+          </a:prstGeom>
+          <a:noFill/>
+        </p:spPr>
+        <p:txBody>
+          <a:bodyPr wrap="square">
+            <a:spAutoFit/>
+          </a:bodyPr>
+          <a:lstStyle/>
+          <a:p>
+            <a:r>
+              <a:rPr sz="2000" b="1">
+                <a:solidFill>
+                  <a:srgbClr val="222222"/>
+                </a:solidFill>
+                <a:latin typeface="Calibri"/>
+              </a:rPr>
+              <a:t>1. Compare symmetric and asymmetric encryption. (4)</a:t>
+            </a:r>
+          </a:p>
+          <a:p>
+            <a:pPr lvl="1"/>
+            <a:r>
+              <a:rPr sz="1800" i="1">
+                <a:solidFill>
+                  <a:srgbClr val="B76E00"/>
+                </a:solidFill>
+                <a:latin typeface="Calibri"/>
+              </a:rPr>
+              <a:t>Answer: Symmetric uses one shared key for encryption and decryption; asymmetric uses a public and private key pair (1). Symmetric is faster and suits bulk data (1) but the shared key must be exchanged securely, the key distribution problem (1); asymmetric solves distribution because the public key is shared openly, though it is slower (1).</a:t>
+            </a:r>
+          </a:p>
+          <a:p>
+            <a:r>
+              <a:rPr sz="2000" b="1">
+                <a:solidFill>
+                  <a:srgbClr val="222222"/>
+                </a:solidFill>
+                <a:latin typeface="Calibri"/>
+              </a:rPr>
+              <a:t>2. Ben receives a message with a digital signature. Explain how he verifies who sent it and that it is unchanged. (3)</a:t>
+            </a:r>
+          </a:p>
+          <a:p>
+            <a:pPr lvl="1"/>
+            <a:r>
+              <a:rPr sz="1800" i="1">
+                <a:solidFill>
+                  <a:srgbClr val="B76E00"/>
+                </a:solidFill>
+                <a:latin typeface="Calibri"/>
+              </a:rPr>
+              <a:t>Answer: He decrypts the signature with the sender's public key to recover the original hash (1); he hashes the received message himself (1); matching hashes prove the sender's private key signed it and the content was not altered (1).</a:t>
+            </a:r>
+          </a:p>
+          <a:p>
+            <a:r>
+              <a:rPr sz="2000" b="1">
+                <a:solidFill>
+                  <a:srgbClr val="222222"/>
+                </a:solidFill>
+                <a:latin typeface="Calibri"/>
+              </a:rPr>
+              <a:t>3. Explain why an online store should hash rather than encrypt its customers' passwords. (3)</a:t>
+            </a:r>
+          </a:p>
+          <a:p>
+            <a:pPr lvl="1"/>
+            <a:r>
+              <a:rPr sz="1800" i="1">
+                <a:solidFill>
+                  <a:srgbClr val="B76E00"/>
+                </a:solidFill>
+                <a:latin typeface="Calibri"/>
+              </a:rPr>
+              <a:t>Answer: Hashing is one-way, so the password cannot be recovered even if the database is stolen (1); encryption is reversible, so a stolen key would expose every password (1); logins still work by hashing the entered password and comparing hashes (1).</a:t>
+            </a:r>
+          </a:p>
+          <a:p>
+            <a:r>
+              <a:rPr sz="2000" b="1">
+                <a:solidFill>
+                  <a:srgbClr val="222222"/>
+                </a:solidFill>
+                <a:latin typeface="Calibri"/>
+              </a:rPr>
+              <a:t>4. State two properties of a good hash function. (2)</a:t>
+            </a:r>
+          </a:p>
+          <a:p>
+            <a:pPr lvl="1"/>
+            <a:r>
+              <a:rPr sz="1800" i="1">
+                <a:solidFill>
+                  <a:srgbClr val="B76E00"/>
+                </a:solidFill>
+                <a:latin typeface="Calibri"/>
+              </a:rPr>
+              <a:t>Answer: Any two of: one-way, so the input cannot be recovered (1); deterministic, with the same input always giving the same hash (1); quick to compute, or a low chance of collisions (1).</a:t>
+            </a:r>
+          </a:p>
+        </p:txBody>
+      </p:sp>
+    </p:spTree>
+  </p:cSld>
+  <p:clrMapOvr>
+    <a:masterClrMapping/>
+  </p:clrMapOvr>
+</p:sld>
+</file>
+
+<file path=ppt/slides/slide26.xml><?xml version="1.0" encoding="utf-8"?>
+<p:sld xmlns:a="http://schemas.openxmlformats.org/drawingml/2006/main" xmlns:p="http://schemas.openxmlformats.org/presentationml/2006/main" xmlns:r="http://schemas.openxmlformats.org/officeDocument/2006/relationships">
+  <p:cSld>
+    <p:bg>
+      <p:bgPr>
+        <a:solidFill>
+          <a:srgbClr val="FFFFFF"/>
+        </a:solidFill>
+        <a:effectLst/>
+      </p:bgPr>
+    </p:bg>
+    <p:spTree>
+      <p:nvGrpSpPr>
+        <p:cNvPr id="1" name=""/>
+        <p:cNvGrpSpPr/>
+        <p:nvPr/>
+      </p:nvGrpSpPr>
+      <p:grpSpPr/>
+      <p:sp>
+        <p:nvSpPr>
+          <p:cNvPr id="2" name="TextBox 1"/>
+          <p:cNvSpPr txBox="1"/>
+          <p:nvPr/>
+        </p:nvSpPr>
+        <p:spPr>
+          <a:xfrm>
+            <a:off x="548640" y="274320"/>
+            <a:ext cx="11064240" cy="822960"/>
+          </a:xfrm>
+          <a:prstGeom prst="rect">
+            <a:avLst/>
+          </a:prstGeom>
+          <a:noFill/>
+        </p:spPr>
+        <p:txBody>
+          <a:bodyPr wrap="square">
+            <a:spAutoFit/>
+          </a:bodyPr>
+          <a:lstStyle/>
+          <a:p>
+            <a:r>
+              <a:rPr sz="3000" b="1" i="0">
+                <a:solidFill>
+                  <a:srgbClr val="2B6CB0"/>
+                </a:solidFill>
+                <a:latin typeface="Calibri"/>
+              </a:rPr>
+              <a:t>Common misconceptions</a:t>
+            </a:r>
+          </a:p>
+        </p:txBody>
+      </p:sp>
+      <p:sp>
+        <p:nvSpPr>
+          <p:cNvPr id="3" name="TextBox 2"/>
+          <p:cNvSpPr txBox="1"/>
+          <p:nvPr/>
+        </p:nvSpPr>
+        <p:spPr>
+          <a:xfrm>
+            <a:off x="640080" y="1280160"/>
+            <a:ext cx="10881360" cy="5120640"/>
+          </a:xfrm>
+          <a:prstGeom prst="rect">
+            <a:avLst/>
+          </a:prstGeom>
+          <a:noFill/>
+        </p:spPr>
+        <p:txBody>
+          <a:bodyPr wrap="square">
+            <a:spAutoFit/>
+          </a:bodyPr>
+          <a:lstStyle/>
+          <a:p>
+            <a:pPr/>
+            <a:r>
+              <a:rPr sz="2000" b="0">
+                <a:solidFill>
+                  <a:srgbClr val="222222"/>
+                </a:solidFill>
+                <a:latin typeface="Calibri"/>
+              </a:rPr>
+              <a:t>✗ Students often think hashed data can be decrypted with the right key, but hashing is one-way and has no key at all.</a:t>
+            </a:r>
+          </a:p>
+          <a:p>
+            <a:pPr/>
+            <a:r>
+              <a:rPr sz="2000" b="0">
+                <a:solidFill>
+                  <a:srgbClr val="222222"/>
+                </a:solidFill>
+                <a:latin typeface="Calibri"/>
+              </a:rPr>
+              <a:t>✗ Students often think lossy just means lower quality, but the defining point is that removed data can never be recovered.</a:t>
+            </a:r>
+          </a:p>
+          <a:p>
+            <a:pPr/>
+            <a:r>
+              <a:rPr sz="2000" b="0">
+                <a:solidFill>
+                  <a:srgbClr val="222222"/>
+                </a:solidFill>
+                <a:latin typeface="Calibri"/>
+              </a:rPr>
+              <a:t>✗ Students often think RLE always shrinks files, but data without long runs can grow, even double.</a:t>
+            </a:r>
+          </a:p>
+          <a:p>
+            <a:pPr/>
+            <a:r>
+              <a:rPr sz="2000" b="0">
+                <a:solidFill>
+                  <a:srgbClr val="222222"/>
+                </a:solidFill>
+                <a:latin typeface="Calibri"/>
+              </a:rPr>
+              <a:t>✗ Students often think the private key is shared between both parties, but only the public key is distributed; the private key never leaves its owner.</a:t>
+            </a:r>
+          </a:p>
+          <a:p>
+            <a:pPr/>
+            <a:r>
+              <a:rPr sz="2000" b="0">
+                <a:solidFill>
+                  <a:srgbClr val="222222"/>
+                </a:solidFill>
+                <a:latin typeface="Calibri"/>
+              </a:rPr>
+              <a:t>✗ Students often think lossless means no compression happened, but it re-encodes redundancy while keeping the original exactly recoverable.</a:t>
+            </a:r>
+          </a:p>
+        </p:txBody>
+      </p:sp>
+    </p:spTree>
+  </p:cSld>
+  <p:clrMapOvr>
+    <a:masterClrMapping/>
+  </p:clrMapOvr>
+</p:sld>
+</file>
+
+<file path=ppt/slides/slide27.xml><?xml version="1.0" encoding="utf-8"?>
+<p:sld xmlns:a="http://schemas.openxmlformats.org/drawingml/2006/main" xmlns:p="http://schemas.openxmlformats.org/presentationml/2006/main" xmlns:r="http://schemas.openxmlformats.org/officeDocument/2006/relationships">
+  <p:cSld>
+    <p:bg>
+      <p:bgPr>
+        <a:solidFill>
+          <a:srgbClr val="FFFFFF"/>
+        </a:solidFill>
+        <a:effectLst/>
+      </p:bgPr>
+    </p:bg>
+    <p:spTree>
+      <p:nvGrpSpPr>
+        <p:cNvPr id="1" name=""/>
+        <p:cNvGrpSpPr/>
+        <p:nvPr/>
+      </p:nvGrpSpPr>
+      <p:grpSpPr/>
+      <p:sp>
+        <p:nvSpPr>
+          <p:cNvPr id="2" name="TextBox 1"/>
+          <p:cNvSpPr txBox="1"/>
+          <p:nvPr/>
+        </p:nvSpPr>
+        <p:spPr>
+          <a:xfrm>
+            <a:off x="548640" y="274320"/>
+            <a:ext cx="11064240" cy="822960"/>
+          </a:xfrm>
+          <a:prstGeom prst="rect">
+            <a:avLst/>
+          </a:prstGeom>
+          <a:noFill/>
+        </p:spPr>
+        <p:txBody>
+          <a:bodyPr wrap="square">
+            <a:spAutoFit/>
+          </a:bodyPr>
+          <a:lstStyle/>
+          <a:p>
+            <a:r>
+              <a:rPr sz="3000" b="1" i="0">
+                <a:solidFill>
+                  <a:srgbClr val="2B6CB0"/>
+                </a:solidFill>
+                <a:latin typeface="Calibri"/>
+              </a:rPr>
+              <a:t>How the exam asks this</a:t>
+            </a:r>
+          </a:p>
+        </p:txBody>
+      </p:sp>
+      <p:sp>
+        <p:nvSpPr>
+          <p:cNvPr id="3" name="TextBox 2"/>
+          <p:cNvSpPr txBox="1"/>
+          <p:nvPr/>
+        </p:nvSpPr>
+        <p:spPr>
+          <a:xfrm>
+            <a:off x="640080" y="1280160"/>
+            <a:ext cx="10881360" cy="5120640"/>
+          </a:xfrm>
+          <a:prstGeom prst="rect">
+            <a:avLst/>
+          </a:prstGeom>
+          <a:noFill/>
+        </p:spPr>
+        <p:txBody>
+          <a:bodyPr wrap="square">
+            <a:spAutoFit/>
+          </a:bodyPr>
+          <a:lstStyle/>
+          <a:p>
+            <a:pPr/>
+            <a:r>
+              <a:rPr sz="2000" b="0">
+                <a:solidFill>
+                  <a:srgbClr val="222222"/>
+                </a:solidFill>
+                <a:latin typeface="Calibri"/>
+              </a:rPr>
+              <a:t>Command words: state and describe for definitions and techniques, 2 to 3 marks; explain, compare and justify for scenarios, 3 to 4 marks.</a:t>
+            </a:r>
+          </a:p>
+          <a:p>
+            <a:pPr/>
+            <a:r>
+              <a:rPr sz="2000" b="0">
+                <a:solidFill>
+                  <a:srgbClr val="222222"/>
+                </a:solidFill>
+                <a:latin typeface="Calibri"/>
+              </a:rPr>
+              <a:t>Compression questions often supply raw data to encode with RLE, or a scenario asking you to choose and justify lossy or lossless.</a:t>
+            </a:r>
+          </a:p>
+          <a:p>
+            <a:pPr/>
+            <a:r>
+              <a:rPr sz="2000" b="0">
+                <a:solidFill>
+                  <a:srgbClr val="222222"/>
+                </a:solidFill>
+                <a:latin typeface="Calibri"/>
+              </a:rPr>
+              <a:t>Encryption questions reward precise key language: who holds which key, and which key performs each operation.</a:t>
+            </a:r>
+          </a:p>
+          <a:p>
+            <a:pPr/>
+            <a:r>
+              <a:rPr sz="2000" b="0">
+                <a:solidFill>
+                  <a:srgbClr val="222222"/>
+                </a:solidFill>
+                <a:latin typeface="Calibri"/>
+              </a:rPr>
+              <a:t>Example stem: A company sends confidential designs to a partner over the internet. Explain how asymmetric encryption keeps the designs secure. (4)</a:t>
+            </a:r>
+          </a:p>
+        </p:txBody>
+      </p:sp>
+    </p:spTree>
+  </p:cSld>
+  <p:clrMapOvr>
+    <a:masterClrMapping/>
+  </p:clrMapOvr>
+</p:sld>
+</file>
+
+<file path=ppt/slides/slide28.xml><?xml version="1.0" encoding="utf-8"?>
+<p:sld xmlns:a="http://schemas.openxmlformats.org/drawingml/2006/main" xmlns:p="http://schemas.openxmlformats.org/presentationml/2006/main" xmlns:r="http://schemas.openxmlformats.org/officeDocument/2006/relationships">
+  <p:cSld>
+    <p:bg>
+      <p:bgPr>
+        <a:solidFill>
+          <a:srgbClr val="FFFFFF"/>
+        </a:solidFill>
+        <a:effectLst/>
+      </p:bgPr>
+    </p:bg>
+    <p:spTree>
+      <p:nvGrpSpPr>
+        <p:cNvPr id="1" name=""/>
+        <p:cNvGrpSpPr/>
+        <p:nvPr/>
+      </p:nvGrpSpPr>
+      <p:grpSpPr/>
+      <p:sp>
+        <p:nvSpPr>
+          <p:cNvPr id="2" name="TextBox 1"/>
+          <p:cNvSpPr txBox="1"/>
+          <p:nvPr/>
+        </p:nvSpPr>
+        <p:spPr>
+          <a:xfrm>
+            <a:off x="548640" y="274320"/>
+            <a:ext cx="11064240" cy="822960"/>
+          </a:xfrm>
+          <a:prstGeom prst="rect">
+            <a:avLst/>
+          </a:prstGeom>
+          <a:noFill/>
+        </p:spPr>
+        <p:txBody>
+          <a:bodyPr wrap="square">
+            <a:spAutoFit/>
+          </a:bodyPr>
+          <a:lstStyle/>
+          <a:p>
+            <a:r>
+              <a:rPr sz="3000" b="1" i="0">
+                <a:solidFill>
+                  <a:srgbClr val="2B6CB0"/>
+                </a:solidFill>
+                <a:latin typeface="Calibri"/>
+              </a:rPr>
+              <a:t>Your turn</a:t>
+            </a:r>
+          </a:p>
+        </p:txBody>
+      </p:sp>
+      <p:sp>
+        <p:nvSpPr>
+          <p:cNvPr id="3" name="TextBox 2"/>
+          <p:cNvSpPr txBox="1"/>
+          <p:nvPr/>
+        </p:nvSpPr>
+        <p:spPr>
+          <a:xfrm>
+            <a:off x="640080" y="1280160"/>
+            <a:ext cx="10881360" cy="5120640"/>
+          </a:xfrm>
+          <a:prstGeom prst="rect">
+            <a:avLst/>
+          </a:prstGeom>
+          <a:noFill/>
+        </p:spPr>
+        <p:txBody>
+          <a:bodyPr wrap="square">
+            <a:spAutoFit/>
+          </a:bodyPr>
+          <a:lstStyle/>
+          <a:p>
+            <a:pPr/>
+            <a:r>
+              <a:rPr sz="2400" b="1">
+                <a:solidFill>
+                  <a:srgbClr val="2B6CB0"/>
+                </a:solidFill>
+                <a:latin typeface="Calibri"/>
+              </a:rPr>
+              <a:t>Task</a:t>
+            </a:r>
+          </a:p>
+          <a:p>
+            <a:pPr lvl="1"/>
+            <a:r>
+              <a:rPr sz="2200" b="0">
+                <a:solidFill>
+                  <a:srgbClr val="222222"/>
+                </a:solidFill>
+                <a:latin typeface="Calibri"/>
+              </a:rPr>
+              <a:t>Produce a one-page comparison chart of RLE, dictionary coding, symmetric encryption, asymmetric encryption and hashing: what each does, whether it is reversible, one strength, one weakness and one real use.</a:t>
+            </a:r>
+          </a:p>
+          <a:p>
+            <a:r>
+              <a:rPr sz="2400" b="1">
+                <a:solidFill>
+                  <a:srgbClr val="B76E00"/>
+                </a:solidFill>
+                <a:latin typeface="Calibri"/>
+              </a:rPr>
+              <a:t>Challenge / stretch</a:t>
+            </a:r>
+          </a:p>
+          <a:p>
+            <a:pPr lvl="1"/>
+            <a:r>
+              <a:rPr sz="2200" b="0">
+                <a:solidFill>
+                  <a:srgbClr val="222222"/>
+                </a:solidFill>
+                <a:latin typeface="Calibri"/>
+              </a:rPr>
+              <a:t>A hospital must transmit patient scan images quickly to consultants and store staff passwords safely. Recommend and justify a compression choice for the scans, discussing the danger of lossy artefacts in diagnosis, then design the full login storage scheme naming where hashing is used and why encryption alone would be worse.</a:t>
+            </a:r>
+          </a:p>
+        </p:txBody>
+      </p:sp>
+    </p:spTree>
+  </p:cSld>
+  <p:clrMapOvr>
+    <a:masterClrMapping/>
+  </p:clrMapOvr>
+</p:sld>
+</file>
+
+<file path=ppt/slides/slide29.xml><?xml version="1.0" encoding="utf-8"?>
+<p:sld xmlns:a="http://schemas.openxmlformats.org/drawingml/2006/main" xmlns:p="http://schemas.openxmlformats.org/presentationml/2006/main" xmlns:r="http://schemas.openxmlformats.org/officeDocument/2006/relationships">
+  <p:cSld>
+    <p:bg>
+      <p:bgPr>
+        <a:solidFill>
+          <a:srgbClr val="FFFFFF"/>
+        </a:solidFill>
+        <a:effectLst/>
+      </p:bgPr>
+    </p:bg>
+    <p:spTree>
+      <p:nvGrpSpPr>
+        <p:cNvPr id="1" name=""/>
+        <p:cNvGrpSpPr/>
+        <p:nvPr/>
+      </p:nvGrpSpPr>
+      <p:grpSpPr/>
+      <p:sp>
+        <p:nvSpPr>
+          <p:cNvPr id="2" name="TextBox 1"/>
+          <p:cNvSpPr txBox="1"/>
+          <p:nvPr/>
+        </p:nvSpPr>
+        <p:spPr>
+          <a:xfrm>
+            <a:off x="548640" y="274320"/>
+            <a:ext cx="11064240" cy="822960"/>
+          </a:xfrm>
+          <a:prstGeom prst="rect">
+            <a:avLst/>
+          </a:prstGeom>
+          <a:noFill/>
+        </p:spPr>
+        <p:txBody>
+          <a:bodyPr wrap="square">
+            <a:spAutoFit/>
+          </a:bodyPr>
+          <a:lstStyle/>
+          <a:p>
+            <a:r>
+              <a:rPr sz="3000" b="1" i="0">
+                <a:solidFill>
+                  <a:srgbClr val="2B6CB0"/>
+                </a:solidFill>
+                <a:latin typeface="Calibri"/>
+              </a:rPr>
+              <a:t>Exit ticket</a:t>
+            </a:r>
+          </a:p>
+        </p:txBody>
+      </p:sp>
+      <p:sp>
+        <p:nvSpPr>
+          <p:cNvPr id="3" name="TextBox 2"/>
+          <p:cNvSpPr txBox="1"/>
+          <p:nvPr/>
+        </p:nvSpPr>
+        <p:spPr>
+          <a:xfrm>
+            <a:off x="640080" y="1280160"/>
+            <a:ext cx="10881360" cy="5120640"/>
+          </a:xfrm>
+          <a:prstGeom prst="rect">
+            <a:avLst/>
+          </a:prstGeom>
+          <a:noFill/>
+        </p:spPr>
+        <p:txBody>
+          <a:bodyPr wrap="square">
+            <a:spAutoFit/>
+          </a:bodyPr>
+          <a:lstStyle/>
+          <a:p>
+            <a:r>
+              <a:rPr sz="2200" b="1">
+                <a:solidFill>
+                  <a:srgbClr val="222222"/>
+                </a:solidFill>
+                <a:latin typeface="Calibri"/>
+              </a:rPr>
+              <a:t>1. Encode BBBBBBWWB with run length encoding.</a:t>
+            </a:r>
+          </a:p>
+          <a:p>
+            <a:r>
+              <a:rPr sz="2200" b="1">
+                <a:solidFill>
+                  <a:srgbClr val="222222"/>
+                </a:solidFill>
+                <a:latin typeface="Calibri"/>
+              </a:rPr>
+              <a:t>2. Which key does Alia use so only Ben can read her message, and which key opens it?</a:t>
+            </a:r>
+          </a:p>
+          <a:p>
+            <a:r>
+              <a:rPr sz="2200" b="1">
+                <a:solidFill>
+                  <a:srgbClr val="222222"/>
+                </a:solidFill>
+                <a:latin typeface="Calibri"/>
+              </a:rPr>
+              <a:t>3. Give two reasons hashing suits password storage.</a:t>
             </a:r>
           </a:p>
         </p:txBody>
@@ -3984,7 +6396,7 @@
                 </a:solidFill>
                 <a:latin typeface="Calibri"/>
               </a:rPr>
-              <a:t>1. State two reasons why files are compressed.</a:t>
+              <a:t>1. An LMC program runs LDA NUM, ADD NUM, OUT, HLT with NUM DAT 6. What is output?</a:t>
             </a:r>
           </a:p>
           <a:p>
@@ -3995,7 +6407,7 @@
                 </a:solidFill>
                 <a:latin typeface="Calibri"/>
               </a:rPr>
-              <a:t>2. Which type of compression permanently removes data so the original cannot be exactly recovered?</a:t>
+              <a:t>2. What is the difference between immediate and direct addressing?</a:t>
             </a:r>
           </a:p>
           <a:p>
@@ -4006,7 +6418,7 @@
                 </a:solidFill>
                 <a:latin typeface="Calibri"/>
               </a:rPr>
-              <a:t>3. Give one suitable use of lossless compression and one of lossy compression.</a:t>
+              <a:t>3. Under indirect addressing, what does the operand hold?</a:t>
             </a:r>
           </a:p>
           <a:p>
@@ -4017,7 +6429,7 @@
                 </a:solidFill>
                 <a:latin typeface="Calibri"/>
               </a:rPr>
-              <a:t>4. Interleaving (1.2): Why is open-source software often distributed in a ZIP archive?</a:t>
+              <a:t>4. Define encapsulation.</a:t>
             </a:r>
           </a:p>
           <a:p>
@@ -4028,7 +6440,159 @@
                 </a:solidFill>
                 <a:latin typeface="Calibri"/>
               </a:rPr>
-              <a:t>5. Interleaving (1.1.3): Why does a higher audio sample rate produce larger files, making compression useful?</a:t>
+              <a:t>5. What is the difference between a class and an object?</a:t>
+            </a:r>
+          </a:p>
+        </p:txBody>
+      </p:sp>
+    </p:spTree>
+  </p:cSld>
+  <p:clrMapOvr>
+    <a:masterClrMapping/>
+  </p:clrMapOvr>
+</p:sld>
+</file>
+
+<file path=ppt/slides/slide30.xml><?xml version="1.0" encoding="utf-8"?>
+<p:sld xmlns:a="http://schemas.openxmlformats.org/drawingml/2006/main" xmlns:p="http://schemas.openxmlformats.org/presentationml/2006/main" xmlns:r="http://schemas.openxmlformats.org/officeDocument/2006/relationships">
+  <p:cSld>
+    <p:bg>
+      <p:bgPr>
+        <a:solidFill>
+          <a:srgbClr val="FFFFFF"/>
+        </a:solidFill>
+        <a:effectLst/>
+      </p:bgPr>
+    </p:bg>
+    <p:spTree>
+      <p:nvGrpSpPr>
+        <p:cNvPr id="1" name=""/>
+        <p:cNvGrpSpPr/>
+        <p:nvPr/>
+      </p:nvGrpSpPr>
+      <p:grpSpPr/>
+      <p:sp>
+        <p:nvSpPr>
+          <p:cNvPr id="2" name="TextBox 1"/>
+          <p:cNvSpPr txBox="1"/>
+          <p:nvPr/>
+        </p:nvSpPr>
+        <p:spPr>
+          <a:xfrm>
+            <a:off x="548640" y="274320"/>
+            <a:ext cx="11064240" cy="822960"/>
+          </a:xfrm>
+          <a:prstGeom prst="rect">
+            <a:avLst/>
+          </a:prstGeom>
+          <a:noFill/>
+        </p:spPr>
+        <p:txBody>
+          <a:bodyPr wrap="square">
+            <a:spAutoFit/>
+          </a:bodyPr>
+          <a:lstStyle/>
+          <a:p>
+            <a:r>
+              <a:rPr sz="3000" b="1" i="0">
+                <a:solidFill>
+                  <a:srgbClr val="2B6CB0"/>
+                </a:solidFill>
+                <a:latin typeface="Calibri"/>
+              </a:rPr>
+              <a:t>Exit ticket — answers</a:t>
+            </a:r>
+          </a:p>
+        </p:txBody>
+      </p:sp>
+      <p:sp>
+        <p:nvSpPr>
+          <p:cNvPr id="3" name="TextBox 2"/>
+          <p:cNvSpPr txBox="1"/>
+          <p:nvPr/>
+        </p:nvSpPr>
+        <p:spPr>
+          <a:xfrm>
+            <a:off x="640080" y="1280160"/>
+            <a:ext cx="10881360" cy="5120640"/>
+          </a:xfrm>
+          <a:prstGeom prst="rect">
+            <a:avLst/>
+          </a:prstGeom>
+          <a:noFill/>
+        </p:spPr>
+        <p:txBody>
+          <a:bodyPr wrap="square">
+            <a:spAutoFit/>
+          </a:bodyPr>
+          <a:lstStyle/>
+          <a:p>
+            <a:r>
+              <a:rPr sz="2200" b="1">
+                <a:solidFill>
+                  <a:srgbClr val="222222"/>
+                </a:solidFill>
+                <a:latin typeface="Calibri"/>
+              </a:rPr>
+              <a:t>1. Encode BBBBBBWWB with run length encoding.</a:t>
+            </a:r>
+          </a:p>
+          <a:p>
+            <a:pPr lvl="1"/>
+            <a:r>
+              <a:rPr sz="1800" i="1">
+                <a:solidFill>
+                  <a:srgbClr val="B76E00"/>
+                </a:solidFill>
+                <a:latin typeface="Calibri"/>
+              </a:rPr>
+              <a:t>Answer: 6B 2W 1B: runs of 6, 2 and 1 covering all 9 characters.</a:t>
+            </a:r>
+          </a:p>
+          <a:p>
+            <a:r>
+              <a:rPr sz="2200" b="1">
+                <a:solidFill>
+                  <a:srgbClr val="222222"/>
+                </a:solidFill>
+                <a:latin typeface="Calibri"/>
+              </a:rPr>
+              <a:t>2. Which key does Alia use so only Ben can read her message, and which key opens it?</a:t>
+            </a:r>
+          </a:p>
+          <a:p>
+            <a:pPr lvl="1"/>
+            <a:r>
+              <a:rPr sz="1800" i="1">
+                <a:solidFill>
+                  <a:srgbClr val="B76E00"/>
+                </a:solidFill>
+                <a:latin typeface="Calibri"/>
+              </a:rPr>
+              <a:t>Answer: She encrypts with Ben's public key; only Ben's private key can decrypt it.</a:t>
+            </a:r>
+          </a:p>
+          <a:p>
+            <a:r>
+              <a:rPr sz="2200" b="1">
+                <a:solidFill>
+                  <a:srgbClr val="222222"/>
+                </a:solidFill>
+                <a:latin typeface="Calibri"/>
+              </a:rPr>
+              <a:t>3. Give two reasons hashing suits password storage.</a:t>
+            </a:r>
+          </a:p>
+          <a:p>
+            <a:pPr lvl="1"/>
+            <a:r>
+              <a:rPr sz="1800" i="1">
+                <a:solidFill>
+                  <a:srgbClr val="B76E00"/>
+                </a:solidFill>
+                <a:latin typeface="Calibri"/>
+              </a:rPr>
+              <a:t>Answer: It is one-way, so stored hashes cannot be turned back into passwords; login comparison still works by hashing the attempt and comparing digests.</a:t>
             </a:r>
           </a:p>
         </p:txBody>
@@ -4122,7 +6686,7 @@
                 </a:solidFill>
                 <a:latin typeface="Calibri"/>
               </a:rPr>
-              <a:t>1. State two reasons why files are compressed.</a:t>
+              <a:t>1. An LMC program runs LDA NUM, ADD NUM, OUT, HLT with NUM DAT 6. What is output?</a:t>
             </a:r>
           </a:p>
           <a:p>
@@ -4134,7 +6698,7 @@
                 </a:solidFill>
                 <a:latin typeface="Calibri"/>
               </a:rPr>
-              <a:t>Answer: Less storage space used and less bandwidth needed, giving faster transfer.</a:t>
+              <a:t>Answer: 12: LDA loads 6 into the accumulator, ADD NUM adds 6 giving 12, OUT prints it (1.2.4).</a:t>
             </a:r>
           </a:p>
           <a:p>
@@ -4145,7 +6709,7 @@
                 </a:solidFill>
                 <a:latin typeface="Calibri"/>
               </a:rPr>
-              <a:t>2. Which type of compression permanently removes data so the original cannot be exactly recovered?</a:t>
+              <a:t>2. What is the difference between immediate and direct addressing?</a:t>
             </a:r>
           </a:p>
           <a:p>
@@ -4157,7 +6721,7 @@
                 </a:solidFill>
                 <a:latin typeface="Calibri"/>
               </a:rPr>
-              <a:t>Answer: Lossy compression.</a:t>
+              <a:t>Answer: Immediate uses the operand itself as the value; direct treats the operand as the address of the value, one lookup (1.2.4).</a:t>
             </a:r>
           </a:p>
           <a:p>
@@ -4168,7 +6732,7 @@
                 </a:solidFill>
                 <a:latin typeface="Calibri"/>
               </a:rPr>
-              <a:t>3. Give one suitable use of lossless compression and one of lossy compression.</a:t>
+              <a:t>3. Under indirect addressing, what does the operand hold?</a:t>
             </a:r>
           </a:p>
           <a:p>
@@ -4180,7 +6744,7 @@
                 </a:solidFill>
                 <a:latin typeface="Calibri"/>
               </a:rPr>
-              <a:t>Answer: Lossless: text, program code, ZIP or PNG. Lossy: JPEG images, MP3 audio or video.</a:t>
+              <a:t>Answer: The address of a location that holds the address of the value, so two lookups; it implements pointers (1.2.4).</a:t>
             </a:r>
           </a:p>
           <a:p>
@@ -4191,7 +6755,7 @@
                 </a:solidFill>
                 <a:latin typeface="Calibri"/>
               </a:rPr>
-              <a:t>4. Interleaving (1.2): Why is open-source software often distributed in a ZIP archive?</a:t>
+              <a:t>4. Define encapsulation.</a:t>
             </a:r>
           </a:p>
           <a:p>
@@ -4203,7 +6767,7 @@
                 </a:solidFill>
                 <a:latin typeface="Calibri"/>
               </a:rPr>
-              <a:t>Answer: ZIP uses lossless compression so the original files are recovered exactly while reducing download size.</a:t>
+              <a:t>Answer: Bundling data with its methods and making attributes private so they are accessed only through public methods (1.2.4).</a:t>
             </a:r>
           </a:p>
           <a:p>
@@ -4214,7 +6778,7 @@
                 </a:solidFill>
                 <a:latin typeface="Calibri"/>
               </a:rPr>
-              <a:t>5. Interleaving (1.1.3): Why does a higher audio sample rate produce larger files, making compression useful?</a:t>
+              <a:t>5. What is the difference between a class and an object?</a:t>
             </a:r>
           </a:p>
           <a:p>
@@ -4226,7 +6790,7 @@
                 </a:solidFill>
                 <a:latin typeface="Calibri"/>
               </a:rPr>
-              <a:t>Answer: More samples per second means more stored data per second, so the file is larger and benefits from compression for storage or streaming.</a:t>
+              <a:t>Answer: A class is the template or blueprint; an object is an instance of it created by instantiation (1.2.4).</a:t>
             </a:r>
           </a:p>
         </p:txBody>
@@ -4330,7 +6894,7 @@
                 </a:solidFill>
                 <a:latin typeface="Calibri"/>
               </a:rPr>
-              <a:t> — Reduces file size with no permanent loss of data; the original is exactly recoverable.</a:t>
+              <a:t> — Reduces file size with no permanent data loss; the exact original can be recovered.</a:t>
             </a:r>
           </a:p>
           <a:p>
@@ -4350,7 +6914,7 @@
                 </a:solidFill>
                 <a:latin typeface="Calibri"/>
               </a:rPr>
-              <a:t> — Reduces file size by permanently removing data; the original cannot be exactly recovered.</a:t>
+              <a:t> — Permanently removes data to shrink files much further; the original cannot be recovered.</a:t>
             </a:r>
           </a:p>
           <a:p>
@@ -4361,7 +6925,7 @@
                 </a:solidFill>
                 <a:latin typeface="Calibri"/>
               </a:rPr>
-              <a:t>Run Length Encoding (RLE)</a:t>
+              <a:t>Run length encoding</a:t>
             </a:r>
             <a:r>
               <a:rPr sz="1800">
@@ -4370,7 +6934,7 @@
                 </a:solidFill>
                 <a:latin typeface="Calibri"/>
               </a:rPr>
-              <a:t> — Lossless method that replaces runs of repeated values with a single value plus a count.</a:t>
+              <a:t> — Lossless technique replacing runs of repeated values with one value and a count.</a:t>
             </a:r>
           </a:p>
           <a:p>
@@ -4381,7 +6945,7 @@
                 </a:solidFill>
                 <a:latin typeface="Calibri"/>
               </a:rPr>
-              <a:t>Dictionary compression</a:t>
+              <a:t>Dictionary coding</a:t>
             </a:r>
             <a:r>
               <a:rPr sz="1800">
@@ -4390,7 +6954,7 @@
                 </a:solidFill>
                 <a:latin typeface="Calibri"/>
               </a:rPr>
-              <a:t> — Lossless method that stores recurring patterns once in a dictionary/index and replaces each with a short reference; the dictionary must be sent with the file.</a:t>
+              <a:t> — Lossless technique storing repeated patterns once in a dictionary and replacing each with a short reference.</a:t>
             </a:r>
           </a:p>
           <a:p>
@@ -4410,7 +6974,7 @@
                 </a:solidFill>
                 <a:latin typeface="Calibri"/>
               </a:rPr>
-              <a:t> — The same single key is used to both encrypt and decrypt the data.</a:t>
+              <a:t> — The same shared key both encrypts and decrypts; fast but the key must be exchanged securely.</a:t>
             </a:r>
           </a:p>
           <a:p>
@@ -4430,7 +6994,7 @@
                 </a:solidFill>
                 <a:latin typeface="Calibri"/>
               </a:rPr>
-              <a:t> — Uses a public and private key pair; data encrypted with the public key can only be decrypted with the matching private key.</a:t>
+              <a:t> — A public and private key pair; data encrypted with one key is decrypted only by the other.</a:t>
             </a:r>
           </a:p>
           <a:p>
@@ -4441,6 +7005,26 @@
                 </a:solidFill>
                 <a:latin typeface="Calibri"/>
               </a:rPr>
+              <a:t>Digital signature</a:t>
+            </a:r>
+            <a:r>
+              <a:rPr sz="1800">
+                <a:solidFill>
+                  <a:srgbClr val="222222"/>
+                </a:solidFill>
+                <a:latin typeface="Calibri"/>
+              </a:rPr>
+              <a:t> — A hash of a message encrypted with the sender's private key, proving origin and integrity.</a:t>
+            </a:r>
+          </a:p>
+          <a:p>
+            <a:r>
+              <a:rPr b="1" sz="2000">
+                <a:solidFill>
+                  <a:srgbClr val="1A365D"/>
+                </a:solidFill>
+                <a:latin typeface="Calibri"/>
+              </a:rPr>
               <a:t>Hashing</a:t>
             </a:r>
             <a:r>
@@ -4450,7 +7034,7 @@
                 </a:solidFill>
                 <a:latin typeface="Calibri"/>
               </a:rPr>
-              <a:t> — A one-way function that turns an input into a fixed-length hash/digest that is not reversible.</a:t>
+              <a:t> — A one-way function turning an input into a fixed-length digest that cannot be reversed.</a:t>
             </a:r>
           </a:p>
           <a:p>
@@ -4470,7 +7054,7 @@
                 </a:solidFill>
                 <a:latin typeface="Calibri"/>
               </a:rPr>
-              <a:t> — When two different inputs produce the same hash value; a good hash function makes these rare.</a:t>
+              <a:t> — Two different inputs producing the same hash value; good hash functions make this rare.</a:t>
             </a:r>
           </a:p>
         </p:txBody>
@@ -4530,7 +7114,7 @@
                 </a:solidFill>
                 <a:latin typeface="Calibri"/>
               </a:rPr>
-              <a:t>Compression: lossy vs lossless</a:t>
+              <a:t>Why compress data</a:t>
             </a:r>
           </a:p>
         </p:txBody>
@@ -4559,49 +7143,49 @@
           <a:p>
             <a:pPr/>
             <a:r>
-              <a:rPr sz="2200" b="0">
-                <a:solidFill>
-                  <a:srgbClr val="222222"/>
-                </a:solidFill>
-                <a:latin typeface="Calibri"/>
-              </a:rPr>
-              <a:t>Compression reduces file size to save storage and bandwidth and speed up transfer.</a:t>
+              <a:rPr sz="2000" b="0">
+                <a:solidFill>
+                  <a:srgbClr val="222222"/>
+                </a:solidFill>
+                <a:latin typeface="Calibri"/>
+              </a:rPr>
+              <a:t>Compression reduces the number of bits needed to represent a file.</a:t>
             </a:r>
           </a:p>
           <a:p>
             <a:pPr/>
             <a:r>
-              <a:rPr sz="2200" b="0">
-                <a:solidFill>
-                  <a:srgbClr val="222222"/>
-                </a:solidFill>
-                <a:latin typeface="Calibri"/>
-              </a:rPr>
-              <a:t>Lossless removes no data permanently and the original is exactly recoverable (text, code, ZIP, PNG).</a:t>
+              <a:rPr sz="2000" b="0">
+                <a:solidFill>
+                  <a:srgbClr val="222222"/>
+                </a:solidFill>
+                <a:latin typeface="Calibri"/>
+              </a:rPr>
+              <a:t>Smaller files need less storage space.</a:t>
             </a:r>
           </a:p>
           <a:p>
             <a:pPr/>
             <a:r>
-              <a:rPr sz="2200" b="0">
-                <a:solidFill>
-                  <a:srgbClr val="222222"/>
-                </a:solidFill>
-                <a:latin typeface="Calibri"/>
-              </a:rPr>
-              <a:t>Lossy permanently discards data and the original cannot be recovered, but gives a much smaller file (JPEG, MP3, video).</a:t>
+              <a:rPr sz="2000" b="0">
+                <a:solidFill>
+                  <a:srgbClr val="222222"/>
+                </a:solidFill>
+                <a:latin typeface="Calibri"/>
+              </a:rPr>
+              <a:t>They transfer faster and use less bandwidth, so downloads and streaming work on slower connections.</a:t>
             </a:r>
           </a:p>
           <a:p>
             <a:pPr/>
             <a:r>
-              <a:rPr sz="2200" b="0">
-                <a:solidFill>
-                  <a:srgbClr val="222222"/>
-                </a:solidFill>
-                <a:latin typeface="Calibri"/>
-              </a:rPr>
-              <a:t>Exam reminder: lossy is not reversible — reduced quality is not the same as recoverable.</a:t>
+              <a:rPr sz="2000" b="0">
+                <a:solidFill>
+                  <a:srgbClr val="222222"/>
+                </a:solidFill>
+                <a:latin typeface="Calibri"/>
+              </a:rPr>
+              <a:t>The trade-off is processing time to compress and decompress.</a:t>
             </a:r>
           </a:p>
         </p:txBody>
@@ -4661,7 +7245,7 @@
                 </a:solidFill>
                 <a:latin typeface="Calibri"/>
               </a:rPr>
-              <a:t>RLE and dictionary compression</a:t>
+              <a:t>Lossless compression</a:t>
             </a:r>
           </a:p>
         </p:txBody>
@@ -4690,49 +7274,49 @@
           <a:p>
             <a:pPr/>
             <a:r>
-              <a:rPr sz="2200" b="0">
-                <a:solidFill>
-                  <a:srgbClr val="222222"/>
-                </a:solidFill>
-                <a:latin typeface="Calibri"/>
-              </a:rPr>
-              <a:t>RLE is lossless and replaces runs of repeated values with one value plus a count.</a:t>
+              <a:rPr sz="2000" b="0">
+                <a:solidFill>
+                  <a:srgbClr val="222222"/>
+                </a:solidFill>
+                <a:latin typeface="Calibri"/>
+              </a:rPr>
+              <a:t>No data is permanently removed: decompression rebuilds the exact original file.</a:t>
             </a:r>
           </a:p>
           <a:p>
             <a:pPr/>
             <a:r>
-              <a:rPr sz="2200" b="0">
-                <a:solidFill>
-                  <a:srgbClr val="222222"/>
-                </a:solidFill>
-                <a:latin typeface="Calibri"/>
-              </a:rPr>
-              <a:t>RLE works best on long runs (e.g. simple images) and can enlarge files when there are few repeats.</a:t>
+              <a:rPr sz="2000" b="0">
+                <a:solidFill>
+                  <a:srgbClr val="222222"/>
+                </a:solidFill>
+                <a:latin typeface="Calibri"/>
+              </a:rPr>
+              <a:t>Works by re-encoding redundancy, such as repeated values or patterns.</a:t>
             </a:r>
           </a:p>
           <a:p>
             <a:pPr/>
             <a:r>
-              <a:rPr sz="2200" b="0">
-                <a:solidFill>
-                  <a:srgbClr val="222222"/>
-                </a:solidFill>
-                <a:latin typeface="Calibri"/>
-              </a:rPr>
-              <a:t>Dictionary compression stores recurring patterns once in a dictionary and replaces them with short references (e.g. LZW).</a:t>
+              <a:rPr sz="2000" b="0">
+                <a:solidFill>
+                  <a:srgbClr val="222222"/>
+                </a:solidFill>
+                <a:latin typeface="Calibri"/>
+              </a:rPr>
+              <a:t>Essential for text, program code, spreadsheets and archives, where any change corrupts the file.</a:t>
             </a:r>
           </a:p>
           <a:p>
             <a:pPr/>
             <a:r>
-              <a:rPr sz="2200" b="0">
-                <a:solidFill>
-                  <a:srgbClr val="222222"/>
-                </a:solidFill>
-                <a:latin typeface="Calibri"/>
-              </a:rPr>
-              <a:t>The dictionary must be supplied with the file so it can be decompressed.</a:t>
+              <a:rPr sz="2000" b="0">
+                <a:solidFill>
+                  <a:srgbClr val="222222"/>
+                </a:solidFill>
+                <a:latin typeface="Calibri"/>
+              </a:rPr>
+              <a:t>Examples: ZIP archives and PNG images; RLE and dictionary coding are lossless techniques.</a:t>
             </a:r>
           </a:p>
         </p:txBody>
@@ -4792,7 +7376,7 @@
                 </a:solidFill>
                 <a:latin typeface="Calibri"/>
               </a:rPr>
-              <a:t>Encryption: symmetric vs asymmetric</a:t>
+              <a:t>Lossy compression</a:t>
             </a:r>
           </a:p>
         </p:txBody>
@@ -4821,49 +7405,61 @@
           <a:p>
             <a:pPr/>
             <a:r>
-              <a:rPr sz="2200" b="0">
-                <a:solidFill>
-                  <a:srgbClr val="222222"/>
-                </a:solidFill>
-                <a:latin typeface="Calibri"/>
-              </a:rPr>
-              <a:t>Encryption scrambles plaintext into ciphertext using an algorithm and a key to protect confidentiality if intercepted.</a:t>
+              <a:rPr sz="2000" b="0">
+                <a:solidFill>
+                  <a:srgbClr val="222222"/>
+                </a:solidFill>
+                <a:latin typeface="Calibri"/>
+              </a:rPr>
+              <a:t>Permanently removes data the human eye or ear barely notices.</a:t>
             </a:r>
           </a:p>
           <a:p>
             <a:pPr/>
             <a:r>
-              <a:rPr sz="2200" b="0">
-                <a:solidFill>
-                  <a:srgbClr val="222222"/>
-                </a:solidFill>
-                <a:latin typeface="Calibri"/>
-              </a:rPr>
-              <a:t>Symmetric uses one shared key for both operations and is fast, but has the key-distribution problem.</a:t>
+              <a:rPr sz="2000" b="0">
+                <a:solidFill>
+                  <a:srgbClr val="222222"/>
+                </a:solidFill>
+                <a:latin typeface="Calibri"/>
+              </a:rPr>
+              <a:t>Achieves much bigger savings than lossless, at the cost of some quality.</a:t>
             </a:r>
           </a:p>
           <a:p>
             <a:pPr/>
             <a:r>
-              <a:rPr sz="2200" b="0">
-                <a:solidFill>
-                  <a:srgbClr val="222222"/>
-                </a:solidFill>
-                <a:latin typeface="Calibri"/>
-              </a:rPr>
-              <a:t>Asymmetric uses a public/private key pair; the public key is shared openly, solving key distribution.</a:t>
+              <a:rPr sz="2000" b="0">
+                <a:solidFill>
+                  <a:srgbClr val="222222"/>
+                </a:solidFill>
+                <a:latin typeface="Calibri"/>
+              </a:rPr>
+              <a:t>The original can never be recovered from the compressed file.</a:t>
             </a:r>
           </a:p>
           <a:p>
             <a:pPr/>
             <a:r>
-              <a:rPr sz="2200" b="0">
-                <a:solidFill>
-                  <a:srgbClr val="222222"/>
-                </a:solidFill>
-                <a:latin typeface="Calibri"/>
-              </a:rPr>
-              <a:t>Data encrypted with a public key can only be decrypted by the matching private key; HTTPS uses asymmetric to swap a symmetric session key, then symmetric for bulk data.</a:t>
+              <a:rPr sz="2000" b="0">
+                <a:solidFill>
+                  <a:srgbClr val="222222"/>
+                </a:solidFill>
+                <a:latin typeface="Calibri"/>
+              </a:rPr>
+              <a:t>Examples: JPEG images, MP3 audio and streamed video.</a:t>
+            </a:r>
+          </a:p>
+          <a:p>
+            <a:pPr/>
+            <a:r>
+              <a:rPr sz="2000" b="0">
+                <a:solidFill>
+                  <a:srgbClr val="222222"/>
+                </a:solidFill>
+                <a:latin typeface="Calibri"/>
+              </a:rPr>
+              <a:t>Choose by scenario: photos for a web page tolerate loss; source code never does.</a:t>
             </a:r>
           </a:p>
         </p:txBody>
@@ -4923,7 +7519,7 @@
                 </a:solidFill>
                 <a:latin typeface="Calibri"/>
               </a:rPr>
-              <a:t>Digital signatures and hashing</a:t>
+              <a:t>Run length encoding</a:t>
             </a:r>
           </a:p>
         </p:txBody>
@@ -4952,49 +7548,49 @@
           <a:p>
             <a:pPr/>
             <a:r>
-              <a:rPr sz="2200" b="0">
-                <a:solidFill>
-                  <a:srgbClr val="222222"/>
-                </a:solidFill>
-                <a:latin typeface="Calibri"/>
-              </a:rPr>
-              <a:t>A digital signature is created by signing with the sender's private key and verified with their public key, proving origin and integrity.</a:t>
+              <a:rPr sz="2000" b="0">
+                <a:solidFill>
+                  <a:srgbClr val="222222"/>
+                </a:solidFill>
+                <a:latin typeface="Calibri"/>
+              </a:rPr>
+              <a:t>RLE replaces each run of identical values with the value and a count.</a:t>
             </a:r>
           </a:p>
           <a:p>
             <a:pPr/>
             <a:r>
-              <a:rPr sz="2200" b="0">
-                <a:solidFill>
-                  <a:srgbClr val="222222"/>
-                </a:solidFill>
-                <a:latin typeface="Calibri"/>
-              </a:rPr>
-              <a:t>Hashing produces a fixed-length digest and is one-way, deterministic, fast and collision-resistant.</a:t>
+              <a:rPr sz="2000" b="0">
+                <a:solidFill>
+                  <a:srgbClr val="222222"/>
+                </a:solidFill>
+                <a:latin typeface="Calibri"/>
+              </a:rPr>
+              <a:t>AAAABBB becomes 4A 3B: two pairs instead of seven characters.</a:t>
             </a:r>
           </a:p>
           <a:p>
             <a:pPr/>
             <a:r>
-              <a:rPr sz="2200" b="0">
-                <a:solidFill>
-                  <a:srgbClr val="222222"/>
-                </a:solidFill>
-                <a:latin typeface="Calibri"/>
-              </a:rPr>
-              <a:t>Passwords are stored as hashes, not plaintext; at login the entered password is hashed and compared.</a:t>
+              <a:rPr sz="2000" b="0">
+                <a:solidFill>
+                  <a:srgbClr val="222222"/>
+                </a:solidFill>
+                <a:latin typeface="Calibri"/>
+              </a:rPr>
+              <a:t>It is lossless: expanding the counts rebuilds the data exactly.</a:t>
             </a:r>
           </a:p>
           <a:p>
             <a:pPr/>
             <a:r>
-              <a:rPr sz="2200" b="0">
-                <a:solidFill>
-                  <a:srgbClr val="222222"/>
-                </a:solidFill>
-                <a:latin typeface="Calibri"/>
-              </a:rPr>
-              <a:t>Hashing is not encryption: hashing is one-way, whereas encryption is reversible with a key.</a:t>
+              <a:rPr sz="2000" b="0">
+                <a:solidFill>
+                  <a:srgbClr val="222222"/>
+                </a:solidFill>
+                <a:latin typeface="Calibri"/>
+              </a:rPr>
+              <a:t>Best on data with long runs, such as simple graphics with blocks of identical pixels.</a:t>
             </a:r>
           </a:p>
         </p:txBody>
